--- a/slides/CSC336-Lecture-01-Introduction-to-Web-Development.pptx
+++ b/slides/CSC336-Lecture-01-Introduction-to-Web-Development.pptx
@@ -2529,9 +2529,87 @@
                 <a:ea typeface="Calibri" pitchFamily="34" charset="-122"/>
                 <a:cs typeface="Calibri" pitchFamily="34" charset="-120"/>
               </a:rPr>
-              <a:t>CSC336 Web Technologies  •  COMSATS University Islamabad</a:t>
+              <a:t>CSC336 Web Technologies</a:t>
             </a:r>
             <a:endParaRPr lang="en-US" sz="1200" dirty="0"/>
+          </a:p>
+        </p:txBody>
+      </p:sp>
+      <p:sp>
+        <p:nvSpPr>
+          <p:cNvPr id="12" name="Text 10"/>
+          <p:cNvSpPr txBox="1"/>
+          <p:nvPr/>
+        </p:nvSpPr>
+        <p:spPr>
+          <a:xfrm>
+            <a:off x="640080" y="6446520"/>
+            <a:ext cx="8686800" cy="292608"/>
+          </a:xfrm>
+          <a:prstGeom prst="rect">
+            <a:avLst/>
+          </a:prstGeom>
+          <a:noFill/>
+          <a:ln/>
+        </p:spPr>
+        <p:txBody>
+          <a:bodyPr wrap="square" lIns="0" tIns="0" rIns="0" bIns="0" rtlCol="0" anchor="ctr"/>
+          <a:lstStyle/>
+          <a:p>
+            <a:pPr algn="l" indent="0" marL="0">
+              <a:buNone/>
+            </a:pPr>
+            <a:r>
+              <a:rPr lang="en-US" sz="900" dirty="0">
+                <a:solidFill>
+                  <a:srgbClr val="9AA3D8"/>
+                </a:solidFill>
+                <a:latin typeface="Calibri" pitchFamily="34" charset="0"/>
+                <a:ea typeface="Calibri" pitchFamily="34" charset="-122"/>
+                <a:cs typeface="Calibri" pitchFamily="34" charset="-120"/>
+              </a:rPr>
+              <a:t>Usman Akram  •  COMSATS University Islamabad</a:t>
+            </a:r>
+            <a:endParaRPr lang="en-US" sz="900" dirty="0"/>
+          </a:p>
+        </p:txBody>
+      </p:sp>
+      <p:sp>
+        <p:nvSpPr>
+          <p:cNvPr id="13" name="Text 11"/>
+          <p:cNvSpPr txBox="1"/>
+          <p:nvPr/>
+        </p:nvSpPr>
+        <p:spPr>
+          <a:xfrm>
+            <a:off x="11155680" y="6446520"/>
+            <a:ext cx="457200" cy="292608"/>
+          </a:xfrm>
+          <a:prstGeom prst="rect">
+            <a:avLst/>
+          </a:prstGeom>
+          <a:noFill/>
+          <a:ln/>
+        </p:spPr>
+        <p:txBody>
+          <a:bodyPr wrap="square" lIns="0" tIns="0" rIns="0" bIns="0" rtlCol="0" anchor="ctr"/>
+          <a:lstStyle/>
+          <a:p>
+            <a:pPr algn="r" indent="0" marL="0">
+              <a:buNone/>
+            </a:pPr>
+            <a:r>
+              <a:rPr lang="en-US" sz="900" dirty="0">
+                <a:solidFill>
+                  <a:srgbClr val="9AA3D8"/>
+                </a:solidFill>
+                <a:latin typeface="Calibri" pitchFamily="34" charset="0"/>
+                <a:ea typeface="Calibri" pitchFamily="34" charset="-122"/>
+                <a:cs typeface="Calibri" pitchFamily="34" charset="-120"/>
+              </a:rPr>
+              <a:t>1</a:t>
+            </a:r>
+            <a:endParaRPr lang="en-US" sz="900" dirty="0"/>
           </a:p>
         </p:txBody>
       </p:sp>
@@ -2576,7 +2654,7 @@
         <p:spPr>
           <a:xfrm>
             <a:off x="640080" y="457200"/>
-            <a:ext cx="9144000" cy="365760"/>
+            <a:ext cx="10058400" cy="365760"/>
           </a:xfrm>
           <a:prstGeom prst="rect">
             <a:avLst/>
@@ -3268,8 +3346,8 @@
         </p:nvSpPr>
         <p:spPr>
           <a:xfrm>
-            <a:off x="640080" y="6419088"/>
-            <a:ext cx="7315200" cy="320040"/>
+            <a:off x="640080" y="6446520"/>
+            <a:ext cx="8686800" cy="292608"/>
           </a:xfrm>
           <a:prstGeom prst="rect">
             <a:avLst/>
@@ -3293,7 +3371,7 @@
                 <a:ea typeface="Calibri" pitchFamily="34" charset="-122"/>
                 <a:cs typeface="Calibri" pitchFamily="34" charset="-120"/>
               </a:rPr>
-              <a:t>CSC336 Web Technologies  •  Lecture 1</a:t>
+              <a:t>Usman Akram  •  COMSATS University Islamabad</a:t>
             </a:r>
             <a:endParaRPr lang="en-US" sz="900" dirty="0"/>
           </a:p>
@@ -3307,8 +3385,8 @@
         </p:nvSpPr>
         <p:spPr>
           <a:xfrm>
-            <a:off x="11155680" y="6419088"/>
-            <a:ext cx="457200" cy="320040"/>
+            <a:off x="11155680" y="6446520"/>
+            <a:ext cx="457200" cy="292608"/>
           </a:xfrm>
           <a:prstGeom prst="rect">
             <a:avLst/>
@@ -3379,7 +3457,7 @@
         <p:spPr>
           <a:xfrm>
             <a:off x="640080" y="457200"/>
-            <a:ext cx="9144000" cy="365760"/>
+            <a:ext cx="10058400" cy="365760"/>
           </a:xfrm>
           <a:prstGeom prst="rect">
             <a:avLst/>
@@ -4151,8 +4229,8 @@
         </p:nvSpPr>
         <p:spPr>
           <a:xfrm>
-            <a:off x="640080" y="6419088"/>
-            <a:ext cx="7315200" cy="320040"/>
+            <a:off x="640080" y="6446520"/>
+            <a:ext cx="8686800" cy="292608"/>
           </a:xfrm>
           <a:prstGeom prst="rect">
             <a:avLst/>
@@ -4176,7 +4254,7 @@
                 <a:ea typeface="Calibri" pitchFamily="34" charset="-122"/>
                 <a:cs typeface="Calibri" pitchFamily="34" charset="-120"/>
               </a:rPr>
-              <a:t>CSC336 Web Technologies  •  Lecture 1</a:t>
+              <a:t>Usman Akram  •  COMSATS University Islamabad</a:t>
             </a:r>
             <a:endParaRPr lang="en-US" sz="900" dirty="0"/>
           </a:p>
@@ -4190,8 +4268,8 @@
         </p:nvSpPr>
         <p:spPr>
           <a:xfrm>
-            <a:off x="11155680" y="6419088"/>
-            <a:ext cx="457200" cy="320040"/>
+            <a:off x="11155680" y="6446520"/>
+            <a:ext cx="457200" cy="292608"/>
           </a:xfrm>
           <a:prstGeom prst="rect">
             <a:avLst/>
@@ -4262,7 +4340,7 @@
         <p:spPr>
           <a:xfrm>
             <a:off x="640080" y="457200"/>
-            <a:ext cx="9144000" cy="365760"/>
+            <a:ext cx="10058400" cy="365760"/>
           </a:xfrm>
           <a:prstGeom prst="rect">
             <a:avLst/>
@@ -5780,8 +5858,8 @@
         </p:nvSpPr>
         <p:spPr>
           <a:xfrm>
-            <a:off x="640080" y="6419088"/>
-            <a:ext cx="7315200" cy="320040"/>
+            <a:off x="640080" y="6446520"/>
+            <a:ext cx="8686800" cy="292608"/>
           </a:xfrm>
           <a:prstGeom prst="rect">
             <a:avLst/>
@@ -5805,7 +5883,7 @@
                 <a:ea typeface="Calibri" pitchFamily="34" charset="-122"/>
                 <a:cs typeface="Calibri" pitchFamily="34" charset="-120"/>
               </a:rPr>
-              <a:t>CSC336 Web Technologies  •  Lecture 1</a:t>
+              <a:t>Usman Akram  •  COMSATS University Islamabad</a:t>
             </a:r>
             <a:endParaRPr lang="en-US" sz="900" dirty="0"/>
           </a:p>
@@ -5819,8 +5897,8 @@
         </p:nvSpPr>
         <p:spPr>
           <a:xfrm>
-            <a:off x="11155680" y="6419088"/>
-            <a:ext cx="457200" cy="320040"/>
+            <a:off x="11155680" y="6446520"/>
+            <a:ext cx="457200" cy="292608"/>
           </a:xfrm>
           <a:prstGeom prst="rect">
             <a:avLst/>
@@ -5891,7 +5969,7 @@
         <p:spPr>
           <a:xfrm>
             <a:off x="640080" y="457200"/>
-            <a:ext cx="9144000" cy="365760"/>
+            <a:ext cx="10058400" cy="365760"/>
           </a:xfrm>
           <a:prstGeom prst="rect">
             <a:avLst/>
@@ -6394,8 +6472,8 @@
         </p:nvSpPr>
         <p:spPr>
           <a:xfrm>
-            <a:off x="640080" y="6419088"/>
-            <a:ext cx="7315200" cy="320040"/>
+            <a:off x="640080" y="6446520"/>
+            <a:ext cx="8686800" cy="292608"/>
           </a:xfrm>
           <a:prstGeom prst="rect">
             <a:avLst/>
@@ -6419,7 +6497,7 @@
                 <a:ea typeface="Calibri" pitchFamily="34" charset="-122"/>
                 <a:cs typeface="Calibri" pitchFamily="34" charset="-120"/>
               </a:rPr>
-              <a:t>CSC336 Web Technologies  •  Lecture 1</a:t>
+              <a:t>Usman Akram  •  COMSATS University Islamabad</a:t>
             </a:r>
             <a:endParaRPr lang="en-US" sz="900" dirty="0"/>
           </a:p>
@@ -6433,8 +6511,8 @@
         </p:nvSpPr>
         <p:spPr>
           <a:xfrm>
-            <a:off x="11155680" y="6419088"/>
-            <a:ext cx="457200" cy="320040"/>
+            <a:off x="11155680" y="6446520"/>
+            <a:ext cx="457200" cy="292608"/>
           </a:xfrm>
           <a:prstGeom prst="rect">
             <a:avLst/>
@@ -6505,7 +6583,7 @@
         <p:spPr>
           <a:xfrm>
             <a:off x="640080" y="457200"/>
-            <a:ext cx="9144000" cy="365760"/>
+            <a:ext cx="10058400" cy="365760"/>
           </a:xfrm>
           <a:prstGeom prst="rect">
             <a:avLst/>
@@ -7446,8 +7524,8 @@
         </p:nvSpPr>
         <p:spPr>
           <a:xfrm>
-            <a:off x="640080" y="6419088"/>
-            <a:ext cx="7315200" cy="320040"/>
+            <a:off x="640080" y="6446520"/>
+            <a:ext cx="8686800" cy="292608"/>
           </a:xfrm>
           <a:prstGeom prst="rect">
             <a:avLst/>
@@ -7471,7 +7549,7 @@
                 <a:ea typeface="Calibri" pitchFamily="34" charset="-122"/>
                 <a:cs typeface="Calibri" pitchFamily="34" charset="-120"/>
               </a:rPr>
-              <a:t>CSC336 Web Technologies  •  Lecture 1</a:t>
+              <a:t>Usman Akram  •  COMSATS University Islamabad</a:t>
             </a:r>
             <a:endParaRPr lang="en-US" sz="900" dirty="0"/>
           </a:p>
@@ -7485,8 +7563,8 @@
         </p:nvSpPr>
         <p:spPr>
           <a:xfrm>
-            <a:off x="11155680" y="6419088"/>
-            <a:ext cx="457200" cy="320040"/>
+            <a:off x="11155680" y="6446520"/>
+            <a:ext cx="457200" cy="292608"/>
           </a:xfrm>
           <a:prstGeom prst="rect">
             <a:avLst/>
@@ -7557,7 +7635,7 @@
         <p:spPr>
           <a:xfrm>
             <a:off x="640080" y="457200"/>
-            <a:ext cx="9144000" cy="365760"/>
+            <a:ext cx="10058400" cy="365760"/>
           </a:xfrm>
           <a:prstGeom prst="rect">
             <a:avLst/>
@@ -8212,8 +8290,8 @@
         </p:nvSpPr>
         <p:spPr>
           <a:xfrm>
-            <a:off x="640080" y="6419088"/>
-            <a:ext cx="7315200" cy="320040"/>
+            <a:off x="640080" y="6446520"/>
+            <a:ext cx="8686800" cy="292608"/>
           </a:xfrm>
           <a:prstGeom prst="rect">
             <a:avLst/>
@@ -8237,7 +8315,7 @@
                 <a:ea typeface="Calibri" pitchFamily="34" charset="-122"/>
                 <a:cs typeface="Calibri" pitchFamily="34" charset="-120"/>
               </a:rPr>
-              <a:t>CSC336 Web Technologies  •  Lecture 1</a:t>
+              <a:t>Usman Akram  •  COMSATS University Islamabad</a:t>
             </a:r>
             <a:endParaRPr lang="en-US" sz="900" dirty="0"/>
           </a:p>
@@ -8251,8 +8329,8 @@
         </p:nvSpPr>
         <p:spPr>
           <a:xfrm>
-            <a:off x="11155680" y="6419088"/>
-            <a:ext cx="457200" cy="320040"/>
+            <a:off x="11155680" y="6446520"/>
+            <a:ext cx="457200" cy="292608"/>
           </a:xfrm>
           <a:prstGeom prst="rect">
             <a:avLst/>
@@ -8980,6 +9058,84 @@
           </a:p>
         </p:txBody>
       </p:sp>
+      <p:sp>
+        <p:nvSpPr>
+          <p:cNvPr id="22" name="Text 20"/>
+          <p:cNvSpPr txBox="1"/>
+          <p:nvPr/>
+        </p:nvSpPr>
+        <p:spPr>
+          <a:xfrm>
+            <a:off x="640080" y="6446520"/>
+            <a:ext cx="8686800" cy="292608"/>
+          </a:xfrm>
+          <a:prstGeom prst="rect">
+            <a:avLst/>
+          </a:prstGeom>
+          <a:noFill/>
+          <a:ln/>
+        </p:spPr>
+        <p:txBody>
+          <a:bodyPr wrap="square" lIns="0" tIns="0" rIns="0" bIns="0" rtlCol="0" anchor="ctr"/>
+          <a:lstStyle/>
+          <a:p>
+            <a:pPr algn="l" indent="0" marL="0">
+              <a:buNone/>
+            </a:pPr>
+            <a:r>
+              <a:rPr lang="en-US" sz="900" dirty="0">
+                <a:solidFill>
+                  <a:srgbClr val="9AA3D8"/>
+                </a:solidFill>
+                <a:latin typeface="Calibri" pitchFamily="34" charset="0"/>
+                <a:ea typeface="Calibri" pitchFamily="34" charset="-122"/>
+                <a:cs typeface="Calibri" pitchFamily="34" charset="-120"/>
+              </a:rPr>
+              <a:t>Usman Akram  •  COMSATS University Islamabad</a:t>
+            </a:r>
+            <a:endParaRPr lang="en-US" sz="900" dirty="0"/>
+          </a:p>
+        </p:txBody>
+      </p:sp>
+      <p:sp>
+        <p:nvSpPr>
+          <p:cNvPr id="23" name="Text 21"/>
+          <p:cNvSpPr txBox="1"/>
+          <p:nvPr/>
+        </p:nvSpPr>
+        <p:spPr>
+          <a:xfrm>
+            <a:off x="11155680" y="6446520"/>
+            <a:ext cx="457200" cy="292608"/>
+          </a:xfrm>
+          <a:prstGeom prst="rect">
+            <a:avLst/>
+          </a:prstGeom>
+          <a:noFill/>
+          <a:ln/>
+        </p:spPr>
+        <p:txBody>
+          <a:bodyPr wrap="square" lIns="0" tIns="0" rIns="0" bIns="0" rtlCol="0" anchor="ctr"/>
+          <a:lstStyle/>
+          <a:p>
+            <a:pPr algn="r" indent="0" marL="0">
+              <a:buNone/>
+            </a:pPr>
+            <a:r>
+              <a:rPr lang="en-US" sz="900" dirty="0">
+                <a:solidFill>
+                  <a:srgbClr val="9AA3D8"/>
+                </a:solidFill>
+                <a:latin typeface="Calibri" pitchFamily="34" charset="0"/>
+                <a:ea typeface="Calibri" pitchFamily="34" charset="-122"/>
+                <a:cs typeface="Calibri" pitchFamily="34" charset="-120"/>
+              </a:rPr>
+              <a:t>16</a:t>
+            </a:r>
+            <a:endParaRPr lang="en-US" sz="900" dirty="0"/>
+          </a:p>
+        </p:txBody>
+      </p:sp>
     </p:spTree>
   </p:cSld>
   <p:clrMapOvr>
@@ -9021,7 +9177,7 @@
         <p:spPr>
           <a:xfrm>
             <a:off x="640080" y="457200"/>
-            <a:ext cx="9144000" cy="365760"/>
+            <a:ext cx="10058400" cy="365760"/>
           </a:xfrm>
           <a:prstGeom prst="rect">
             <a:avLst/>
@@ -9686,8 +9842,8 @@
         </p:nvSpPr>
         <p:spPr>
           <a:xfrm>
-            <a:off x="640080" y="6419088"/>
-            <a:ext cx="7315200" cy="320040"/>
+            <a:off x="640080" y="6446520"/>
+            <a:ext cx="8686800" cy="292608"/>
           </a:xfrm>
           <a:prstGeom prst="rect">
             <a:avLst/>
@@ -9711,7 +9867,7 @@
                 <a:ea typeface="Calibri" pitchFamily="34" charset="-122"/>
                 <a:cs typeface="Calibri" pitchFamily="34" charset="-120"/>
               </a:rPr>
-              <a:t>CSC336 Web Technologies  •  Lecture 1</a:t>
+              <a:t>Usman Akram  •  COMSATS University Islamabad</a:t>
             </a:r>
             <a:endParaRPr lang="en-US" sz="900" dirty="0"/>
           </a:p>
@@ -9725,8 +9881,8 @@
         </p:nvSpPr>
         <p:spPr>
           <a:xfrm>
-            <a:off x="11155680" y="6419088"/>
-            <a:ext cx="457200" cy="320040"/>
+            <a:off x="11155680" y="6446520"/>
+            <a:ext cx="457200" cy="292608"/>
           </a:xfrm>
           <a:prstGeom prst="rect">
             <a:avLst/>
@@ -9797,7 +9953,7 @@
         <p:spPr>
           <a:xfrm>
             <a:off x="640080" y="457200"/>
-            <a:ext cx="9144000" cy="365760"/>
+            <a:ext cx="10058400" cy="365760"/>
           </a:xfrm>
           <a:prstGeom prst="rect">
             <a:avLst/>
@@ -10257,8 +10413,8 @@
         </p:nvSpPr>
         <p:spPr>
           <a:xfrm>
-            <a:off x="640080" y="6419088"/>
-            <a:ext cx="7315200" cy="320040"/>
+            <a:off x="640080" y="6446520"/>
+            <a:ext cx="8686800" cy="292608"/>
           </a:xfrm>
           <a:prstGeom prst="rect">
             <a:avLst/>
@@ -10282,7 +10438,7 @@
                 <a:ea typeface="Calibri" pitchFamily="34" charset="-122"/>
                 <a:cs typeface="Calibri" pitchFamily="34" charset="-120"/>
               </a:rPr>
-              <a:t>CSC336 Web Technologies  •  Lecture 1</a:t>
+              <a:t>Usman Akram  •  COMSATS University Islamabad</a:t>
             </a:r>
             <a:endParaRPr lang="en-US" sz="900" dirty="0"/>
           </a:p>
@@ -10296,8 +10452,8 @@
         </p:nvSpPr>
         <p:spPr>
           <a:xfrm>
-            <a:off x="11155680" y="6419088"/>
-            <a:ext cx="457200" cy="320040"/>
+            <a:off x="11155680" y="6446520"/>
+            <a:ext cx="457200" cy="292608"/>
           </a:xfrm>
           <a:prstGeom prst="rect">
             <a:avLst/>
@@ -10368,7 +10524,7 @@
         <p:spPr>
           <a:xfrm>
             <a:off x="640080" y="457200"/>
-            <a:ext cx="9144000" cy="365760"/>
+            <a:ext cx="10058400" cy="365760"/>
           </a:xfrm>
           <a:prstGeom prst="rect">
             <a:avLst/>
@@ -11054,8 +11210,8 @@
         </p:nvSpPr>
         <p:spPr>
           <a:xfrm>
-            <a:off x="640080" y="6419088"/>
-            <a:ext cx="7315200" cy="320040"/>
+            <a:off x="640080" y="6446520"/>
+            <a:ext cx="8686800" cy="292608"/>
           </a:xfrm>
           <a:prstGeom prst="rect">
             <a:avLst/>
@@ -11079,7 +11235,7 @@
                 <a:ea typeface="Calibri" pitchFamily="34" charset="-122"/>
                 <a:cs typeface="Calibri" pitchFamily="34" charset="-120"/>
               </a:rPr>
-              <a:t>CSC336 Web Technologies  •  Lecture 1</a:t>
+              <a:t>Usman Akram  •  COMSATS University Islamabad</a:t>
             </a:r>
             <a:endParaRPr lang="en-US" sz="900" dirty="0"/>
           </a:p>
@@ -11093,8 +11249,8 @@
         </p:nvSpPr>
         <p:spPr>
           <a:xfrm>
-            <a:off x="11155680" y="6419088"/>
-            <a:ext cx="457200" cy="320040"/>
+            <a:off x="11155680" y="6446520"/>
+            <a:ext cx="457200" cy="292608"/>
           </a:xfrm>
           <a:prstGeom prst="rect">
             <a:avLst/>
@@ -11165,7 +11321,7 @@
         <p:spPr>
           <a:xfrm>
             <a:off x="640080" y="457200"/>
-            <a:ext cx="9144000" cy="365760"/>
+            <a:ext cx="10058400" cy="365760"/>
           </a:xfrm>
           <a:prstGeom prst="rect">
             <a:avLst/>
@@ -11732,8 +11888,8 @@
         </p:nvSpPr>
         <p:spPr>
           <a:xfrm>
-            <a:off x="640080" y="6419088"/>
-            <a:ext cx="7315200" cy="320040"/>
+            <a:off x="640080" y="6446520"/>
+            <a:ext cx="8686800" cy="292608"/>
           </a:xfrm>
           <a:prstGeom prst="rect">
             <a:avLst/>
@@ -11757,7 +11913,7 @@
                 <a:ea typeface="Calibri" pitchFamily="34" charset="-122"/>
                 <a:cs typeface="Calibri" pitchFamily="34" charset="-120"/>
               </a:rPr>
-              <a:t>CSC336 Web Technologies  •  Lecture 1</a:t>
+              <a:t>Usman Akram  •  COMSATS University Islamabad</a:t>
             </a:r>
             <a:endParaRPr lang="en-US" sz="900" dirty="0"/>
           </a:p>
@@ -11771,8 +11927,8 @@
         </p:nvSpPr>
         <p:spPr>
           <a:xfrm>
-            <a:off x="11155680" y="6419088"/>
-            <a:ext cx="457200" cy="320040"/>
+            <a:off x="11155680" y="6446520"/>
+            <a:ext cx="457200" cy="292608"/>
           </a:xfrm>
           <a:prstGeom prst="rect">
             <a:avLst/>
@@ -11843,7 +11999,7 @@
         <p:spPr>
           <a:xfrm>
             <a:off x="640080" y="457200"/>
-            <a:ext cx="9144000" cy="365760"/>
+            <a:ext cx="10058400" cy="365760"/>
           </a:xfrm>
           <a:prstGeom prst="rect">
             <a:avLst/>
@@ -12722,8 +12878,8 @@
         </p:nvSpPr>
         <p:spPr>
           <a:xfrm>
-            <a:off x="640080" y="6419088"/>
-            <a:ext cx="7315200" cy="320040"/>
+            <a:off x="640080" y="6446520"/>
+            <a:ext cx="8686800" cy="292608"/>
           </a:xfrm>
           <a:prstGeom prst="rect">
             <a:avLst/>
@@ -12747,7 +12903,7 @@
                 <a:ea typeface="Calibri" pitchFamily="34" charset="-122"/>
                 <a:cs typeface="Calibri" pitchFamily="34" charset="-120"/>
               </a:rPr>
-              <a:t>CSC336 Web Technologies  •  Lecture 1</a:t>
+              <a:t>Usman Akram  •  COMSATS University Islamabad</a:t>
             </a:r>
             <a:endParaRPr lang="en-US" sz="900" dirty="0"/>
           </a:p>
@@ -12761,8 +12917,8 @@
         </p:nvSpPr>
         <p:spPr>
           <a:xfrm>
-            <a:off x="11155680" y="6419088"/>
-            <a:ext cx="457200" cy="320040"/>
+            <a:off x="11155680" y="6446520"/>
+            <a:ext cx="457200" cy="292608"/>
           </a:xfrm>
           <a:prstGeom prst="rect">
             <a:avLst/>
@@ -12833,7 +12989,7 @@
         <p:spPr>
           <a:xfrm>
             <a:off x="640080" y="457200"/>
-            <a:ext cx="9144000" cy="365760"/>
+            <a:ext cx="10058400" cy="365760"/>
           </a:xfrm>
           <a:prstGeom prst="rect">
             <a:avLst/>
@@ -13278,8 +13434,8 @@
         </p:nvSpPr>
         <p:spPr>
           <a:xfrm>
-            <a:off x="640080" y="6419088"/>
-            <a:ext cx="7315200" cy="320040"/>
+            <a:off x="640080" y="6446520"/>
+            <a:ext cx="8686800" cy="292608"/>
           </a:xfrm>
           <a:prstGeom prst="rect">
             <a:avLst/>
@@ -13303,7 +13459,7 @@
                 <a:ea typeface="Calibri" pitchFamily="34" charset="-122"/>
                 <a:cs typeface="Calibri" pitchFamily="34" charset="-120"/>
               </a:rPr>
-              <a:t>CSC336 Web Technologies  •  Lecture 1</a:t>
+              <a:t>Usman Akram  •  COMSATS University Islamabad</a:t>
             </a:r>
             <a:endParaRPr lang="en-US" sz="900" dirty="0"/>
           </a:p>
@@ -13317,8 +13473,8 @@
         </p:nvSpPr>
         <p:spPr>
           <a:xfrm>
-            <a:off x="11155680" y="6419088"/>
-            <a:ext cx="457200" cy="320040"/>
+            <a:off x="11155680" y="6446520"/>
+            <a:ext cx="457200" cy="292608"/>
           </a:xfrm>
           <a:prstGeom prst="rect">
             <a:avLst/>
@@ -13389,7 +13545,7 @@
         <p:spPr>
           <a:xfrm>
             <a:off x="640080" y="457200"/>
-            <a:ext cx="9144000" cy="365760"/>
+            <a:ext cx="10058400" cy="365760"/>
           </a:xfrm>
           <a:prstGeom prst="rect">
             <a:avLst/>
@@ -14078,8 +14234,8 @@
         </p:nvSpPr>
         <p:spPr>
           <a:xfrm>
-            <a:off x="640080" y="6419088"/>
-            <a:ext cx="7315200" cy="320040"/>
+            <a:off x="640080" y="6446520"/>
+            <a:ext cx="8686800" cy="292608"/>
           </a:xfrm>
           <a:prstGeom prst="rect">
             <a:avLst/>
@@ -14103,7 +14259,7 @@
                 <a:ea typeface="Calibri" pitchFamily="34" charset="-122"/>
                 <a:cs typeface="Calibri" pitchFamily="34" charset="-120"/>
               </a:rPr>
-              <a:t>CSC336 Web Technologies  •  Lecture 1</a:t>
+              <a:t>Usman Akram  •  COMSATS University Islamabad</a:t>
             </a:r>
             <a:endParaRPr lang="en-US" sz="900" dirty="0"/>
           </a:p>
@@ -14117,8 +14273,8 @@
         </p:nvSpPr>
         <p:spPr>
           <a:xfrm>
-            <a:off x="11155680" y="6419088"/>
-            <a:ext cx="457200" cy="320040"/>
+            <a:off x="11155680" y="6446520"/>
+            <a:ext cx="457200" cy="292608"/>
           </a:xfrm>
           <a:prstGeom prst="rect">
             <a:avLst/>
@@ -14189,7 +14345,7 @@
         <p:spPr>
           <a:xfrm>
             <a:off x="640080" y="457200"/>
-            <a:ext cx="9144000" cy="365760"/>
+            <a:ext cx="10058400" cy="365760"/>
           </a:xfrm>
           <a:prstGeom prst="rect">
             <a:avLst/>
@@ -14698,8 +14854,8 @@
         </p:nvSpPr>
         <p:spPr>
           <a:xfrm>
-            <a:off x="640080" y="6419088"/>
-            <a:ext cx="7315200" cy="320040"/>
+            <a:off x="640080" y="6446520"/>
+            <a:ext cx="8686800" cy="292608"/>
           </a:xfrm>
           <a:prstGeom prst="rect">
             <a:avLst/>
@@ -14723,7 +14879,7 @@
                 <a:ea typeface="Calibri" pitchFamily="34" charset="-122"/>
                 <a:cs typeface="Calibri" pitchFamily="34" charset="-120"/>
               </a:rPr>
-              <a:t>CSC336 Web Technologies  •  Lecture 1</a:t>
+              <a:t>Usman Akram  •  COMSATS University Islamabad</a:t>
             </a:r>
             <a:endParaRPr lang="en-US" sz="900" dirty="0"/>
           </a:p>
@@ -14737,8 +14893,8 @@
         </p:nvSpPr>
         <p:spPr>
           <a:xfrm>
-            <a:off x="11155680" y="6419088"/>
-            <a:ext cx="457200" cy="320040"/>
+            <a:off x="11155680" y="6446520"/>
+            <a:ext cx="457200" cy="292608"/>
           </a:xfrm>
           <a:prstGeom prst="rect">
             <a:avLst/>

--- a/slides/CSC336-Lecture-01-Introduction-to-Web-Development.pptx
+++ b/slides/CSC336-Lecture-01-Introduction-to-Web-Development.pptx
@@ -2236,6 +2236,10 @@
             <a:prstDash val="solid"/>
           </a:ln>
         </p:spPr>
+        <p:txBody>
+          <a:bodyPr/>
+          <a:p/>
+        </p:txBody>
       </p:sp>
       <p:sp>
         <p:nvSpPr>
@@ -2256,6 +2260,10 @@
           </a:solidFill>
           <a:ln/>
         </p:spPr>
+        <p:txBody>
+          <a:bodyPr/>
+          <a:p/>
+        </p:txBody>
       </p:sp>
       <p:sp>
         <p:nvSpPr>
@@ -2276,6 +2284,10 @@
           </a:solidFill>
           <a:ln/>
         </p:spPr>
+        <p:txBody>
+          <a:bodyPr/>
+          <a:p/>
+        </p:txBody>
       </p:sp>
       <p:sp>
         <p:nvSpPr>
@@ -2296,6 +2308,10 @@
           </a:solidFill>
           <a:ln/>
         </p:spPr>
+        <p:txBody>
+          <a:bodyPr/>
+          <a:p/>
+        </p:txBody>
       </p:sp>
       <p:sp>
         <p:nvSpPr>
@@ -2316,6 +2332,10 @@
           </a:solidFill>
           <a:ln/>
         </p:spPr>
+        <p:txBody>
+          <a:bodyPr/>
+          <a:p/>
+        </p:txBody>
       </p:sp>
       <p:sp>
         <p:nvSpPr>
@@ -2537,79 +2557,44 @@
       </p:sp>
       <p:sp>
         <p:nvSpPr>
-          <p:cNvPr id="12" name="Text 10"/>
-          <p:cNvSpPr txBox="1"/>
-          <p:nvPr/>
-        </p:nvSpPr>
-        <p:spPr>
-          <a:xfrm>
-            <a:off x="640080" y="6446520"/>
-            <a:ext cx="8686800" cy="292608"/>
-          </a:xfrm>
-          <a:prstGeom prst="rect">
-            <a:avLst/>
-          </a:prstGeom>
-          <a:noFill/>
-          <a:ln/>
-        </p:spPr>
-        <p:txBody>
-          <a:bodyPr wrap="square" lIns="0" tIns="0" rIns="0" bIns="0" rtlCol="0" anchor="ctr"/>
-          <a:lstStyle/>
-          <a:p>
-            <a:pPr algn="l" indent="0" marL="0">
-              <a:buNone/>
-            </a:pPr>
-            <a:r>
-              <a:rPr lang="en-US" sz="900" dirty="0">
-                <a:solidFill>
-                  <a:srgbClr val="9AA3D8"/>
-                </a:solidFill>
-                <a:latin typeface="Calibri" pitchFamily="34" charset="0"/>
-                <a:ea typeface="Calibri" pitchFamily="34" charset="-122"/>
-                <a:cs typeface="Calibri" pitchFamily="34" charset="-120"/>
-              </a:rPr>
-              <a:t>Usman Akram  •  COMSATS University Islamabad</a:t>
-            </a:r>
-            <a:endParaRPr lang="en-US" sz="900" dirty="0"/>
-          </a:p>
-        </p:txBody>
-      </p:sp>
-      <p:sp>
-        <p:nvSpPr>
-          <p:cNvPr id="13" name="Text 11"/>
-          <p:cNvSpPr txBox="1"/>
-          <p:nvPr/>
-        </p:nvSpPr>
-        <p:spPr>
-          <a:xfrm>
-            <a:off x="11155680" y="6446520"/>
-            <a:ext cx="457200" cy="292608"/>
-          </a:xfrm>
-          <a:prstGeom prst="rect">
-            <a:avLst/>
-          </a:prstGeom>
-          <a:noFill/>
-          <a:ln/>
-        </p:spPr>
-        <p:txBody>
-          <a:bodyPr wrap="square" lIns="0" tIns="0" rIns="0" bIns="0" rtlCol="0" anchor="ctr"/>
-          <a:lstStyle/>
-          <a:p>
-            <a:pPr algn="r" indent="0" marL="0">
-              <a:buNone/>
-            </a:pPr>
-            <a:r>
-              <a:rPr lang="en-US" sz="900" dirty="0">
-                <a:solidFill>
-                  <a:srgbClr val="9AA3D8"/>
-                </a:solidFill>
-                <a:latin typeface="Calibri" pitchFamily="34" charset="0"/>
-                <a:ea typeface="Calibri" pitchFamily="34" charset="-122"/>
-                <a:cs typeface="Calibri" pitchFamily="34" charset="-120"/>
-              </a:rPr>
-              <a:t>1</a:t>
-            </a:r>
-            <a:endParaRPr lang="en-US" sz="900" dirty="0"/>
+          <p:cNvPr id="14" name="cuinotes-footer-mark"/>
+          <p:cNvSpPr txBox="1"/>
+          <p:nvPr/>
+        </p:nvSpPr>
+        <p:spPr>
+          <a:xfrm>
+            <a:off x="9951720" y="6455664"/>
+            <a:ext cx="2011680" cy="292608"/>
+          </a:xfrm>
+          <a:prstGeom prst="rect">
+            <a:avLst/>
+          </a:prstGeom>
+          <a:noFill/>
+        </p:spPr>
+        <p:txBody>
+          <a:bodyPr wrap="none" lIns="0" rIns="0" tIns="0" bIns="0">
+            <a:spAutoFit/>
+          </a:bodyPr>
+          <a:lstStyle/>
+          <a:p>
+            <a:pPr algn="r"/>
+            <a:r>
+              <a:rPr sz="1000">
+                <a:solidFill>
+                  <a:srgbClr val="8A939B"/>
+                </a:solidFill>
+                <a:hlinkClick r:id="rId3"/>
+              </a:rPr>
+              <a:t>cuinotes.com</a:t>
+            </a:r>
+            <a:r>
+              <a:rPr sz="1000">
+                <a:solidFill>
+                  <a:srgbClr val="8A939B"/>
+                </a:solidFill>
+              </a:rPr>
+              <a:t>  ·  1</a:t>
+            </a:r>
           </a:p>
         </p:txBody>
       </p:sp>
@@ -2788,6 +2773,10 @@
             <a:prstDash val="solid"/>
           </a:ln>
         </p:spPr>
+        <p:txBody>
+          <a:bodyPr/>
+          <a:p/>
+        </p:txBody>
       </p:sp>
       <p:sp>
         <p:nvSpPr>
@@ -2932,6 +2921,10 @@
             <a:prstDash val="solid"/>
           </a:ln>
         </p:spPr>
+        <p:txBody>
+          <a:bodyPr/>
+          <a:p/>
+        </p:txBody>
       </p:sp>
       <p:sp>
         <p:nvSpPr>
@@ -3076,6 +3069,10 @@
             <a:prstDash val="solid"/>
           </a:ln>
         </p:spPr>
+        <p:txBody>
+          <a:bodyPr/>
+          <a:p/>
+        </p:txBody>
       </p:sp>
       <p:sp>
         <p:nvSpPr>
@@ -3220,6 +3217,10 @@
             <a:prstDash val="solid"/>
           </a:ln>
         </p:spPr>
+        <p:txBody>
+          <a:bodyPr/>
+          <a:p/>
+        </p:txBody>
       </p:sp>
       <p:sp>
         <p:nvSpPr>
@@ -3340,79 +3341,44 @@
       </p:sp>
       <p:sp>
         <p:nvSpPr>
-          <p:cNvPr id="21" name="Text 19"/>
-          <p:cNvSpPr txBox="1"/>
-          <p:nvPr/>
-        </p:nvSpPr>
-        <p:spPr>
-          <a:xfrm>
-            <a:off x="640080" y="6446520"/>
-            <a:ext cx="8686800" cy="292608"/>
-          </a:xfrm>
-          <a:prstGeom prst="rect">
-            <a:avLst/>
-          </a:prstGeom>
-          <a:noFill/>
-          <a:ln/>
-        </p:spPr>
-        <p:txBody>
-          <a:bodyPr wrap="square" lIns="0" tIns="0" rIns="0" bIns="0" rtlCol="0" anchor="ctr"/>
-          <a:lstStyle/>
-          <a:p>
-            <a:pPr algn="l" indent="0" marL="0">
-              <a:buNone/>
-            </a:pPr>
-            <a:r>
-              <a:rPr lang="en-US" sz="900" dirty="0">
-                <a:solidFill>
-                  <a:srgbClr val="5D5D72"/>
-                </a:solidFill>
-                <a:latin typeface="Calibri" pitchFamily="34" charset="0"/>
-                <a:ea typeface="Calibri" pitchFamily="34" charset="-122"/>
-                <a:cs typeface="Calibri" pitchFamily="34" charset="-120"/>
-              </a:rPr>
-              <a:t>Usman Akram  •  COMSATS University Islamabad</a:t>
-            </a:r>
-            <a:endParaRPr lang="en-US" sz="900" dirty="0"/>
-          </a:p>
-        </p:txBody>
-      </p:sp>
-      <p:sp>
-        <p:nvSpPr>
-          <p:cNvPr id="22" name="Text 20"/>
-          <p:cNvSpPr txBox="1"/>
-          <p:nvPr/>
-        </p:nvSpPr>
-        <p:spPr>
-          <a:xfrm>
-            <a:off x="11155680" y="6446520"/>
-            <a:ext cx="457200" cy="292608"/>
-          </a:xfrm>
-          <a:prstGeom prst="rect">
-            <a:avLst/>
-          </a:prstGeom>
-          <a:noFill/>
-          <a:ln/>
-        </p:spPr>
-        <p:txBody>
-          <a:bodyPr wrap="square" lIns="0" tIns="0" rIns="0" bIns="0" rtlCol="0" anchor="ctr"/>
-          <a:lstStyle/>
-          <a:p>
-            <a:pPr algn="r" indent="0" marL="0">
-              <a:buNone/>
-            </a:pPr>
-            <a:r>
-              <a:rPr lang="en-US" sz="900" dirty="0">
-                <a:solidFill>
-                  <a:srgbClr val="5D5D72"/>
-                </a:solidFill>
-                <a:latin typeface="Calibri" pitchFamily="34" charset="0"/>
-                <a:ea typeface="Calibri" pitchFamily="34" charset="-122"/>
-                <a:cs typeface="Calibri" pitchFamily="34" charset="-120"/>
-              </a:rPr>
-              <a:t>10</a:t>
-            </a:r>
-            <a:endParaRPr lang="en-US" sz="900" dirty="0"/>
+          <p:cNvPr id="23" name="cuinotes-footer-mark"/>
+          <p:cNvSpPr txBox="1"/>
+          <p:nvPr/>
+        </p:nvSpPr>
+        <p:spPr>
+          <a:xfrm>
+            <a:off x="9951720" y="6455664"/>
+            <a:ext cx="2011680" cy="292608"/>
+          </a:xfrm>
+          <a:prstGeom prst="rect">
+            <a:avLst/>
+          </a:prstGeom>
+          <a:noFill/>
+        </p:spPr>
+        <p:txBody>
+          <a:bodyPr wrap="none" lIns="0" rIns="0" tIns="0" bIns="0">
+            <a:spAutoFit/>
+          </a:bodyPr>
+          <a:lstStyle/>
+          <a:p>
+            <a:pPr algn="r"/>
+            <a:r>
+              <a:rPr sz="1000">
+                <a:solidFill>
+                  <a:srgbClr val="8A939B"/>
+                </a:solidFill>
+                <a:hlinkClick r:id="rId3"/>
+              </a:rPr>
+              <a:t>cuinotes.com</a:t>
+            </a:r>
+            <a:r>
+              <a:rPr sz="1000">
+                <a:solidFill>
+                  <a:srgbClr val="8A939B"/>
+                </a:solidFill>
+              </a:rPr>
+              <a:t>  ·  10</a:t>
+            </a:r>
           </a:p>
         </p:txBody>
       </p:sp>
@@ -3547,6 +3513,10 @@
           </a:solidFill>
           <a:ln/>
         </p:spPr>
+        <p:txBody>
+          <a:bodyPr/>
+          <a:p/>
+        </p:txBody>
       </p:sp>
       <p:sp>
         <p:nvSpPr>
@@ -3686,6 +3656,10 @@
           </a:solidFill>
           <a:ln/>
         </p:spPr>
+        <p:txBody>
+          <a:bodyPr/>
+          <a:p/>
+        </p:txBody>
       </p:sp>
       <p:sp>
         <p:nvSpPr>
@@ -3825,6 +3799,10 @@
           </a:solidFill>
           <a:ln/>
         </p:spPr>
+        <p:txBody>
+          <a:bodyPr/>
+          <a:p/>
+        </p:txBody>
       </p:sp>
       <p:sp>
         <p:nvSpPr>
@@ -3964,6 +3942,10 @@
           </a:solidFill>
           <a:ln/>
         </p:spPr>
+        <p:txBody>
+          <a:bodyPr/>
+          <a:p/>
+        </p:txBody>
       </p:sp>
       <p:sp>
         <p:nvSpPr>
@@ -4103,6 +4085,10 @@
           </a:solidFill>
           <a:ln/>
         </p:spPr>
+        <p:txBody>
+          <a:bodyPr/>
+          <a:p/>
+        </p:txBody>
       </p:sp>
       <p:sp>
         <p:nvSpPr>
@@ -4223,79 +4209,44 @@
       </p:sp>
       <p:sp>
         <p:nvSpPr>
-          <p:cNvPr id="24" name="Text 22"/>
-          <p:cNvSpPr txBox="1"/>
-          <p:nvPr/>
-        </p:nvSpPr>
-        <p:spPr>
-          <a:xfrm>
-            <a:off x="640080" y="6446520"/>
-            <a:ext cx="8686800" cy="292608"/>
-          </a:xfrm>
-          <a:prstGeom prst="rect">
-            <a:avLst/>
-          </a:prstGeom>
-          <a:noFill/>
-          <a:ln/>
-        </p:spPr>
-        <p:txBody>
-          <a:bodyPr wrap="square" lIns="0" tIns="0" rIns="0" bIns="0" rtlCol="0" anchor="ctr"/>
-          <a:lstStyle/>
-          <a:p>
-            <a:pPr algn="l" indent="0" marL="0">
-              <a:buNone/>
-            </a:pPr>
-            <a:r>
-              <a:rPr lang="en-US" sz="900" dirty="0">
-                <a:solidFill>
-                  <a:srgbClr val="5D5D72"/>
-                </a:solidFill>
-                <a:latin typeface="Calibri" pitchFamily="34" charset="0"/>
-                <a:ea typeface="Calibri" pitchFamily="34" charset="-122"/>
-                <a:cs typeface="Calibri" pitchFamily="34" charset="-120"/>
-              </a:rPr>
-              <a:t>Usman Akram  •  COMSATS University Islamabad</a:t>
-            </a:r>
-            <a:endParaRPr lang="en-US" sz="900" dirty="0"/>
-          </a:p>
-        </p:txBody>
-      </p:sp>
-      <p:sp>
-        <p:nvSpPr>
-          <p:cNvPr id="25" name="Text 23"/>
-          <p:cNvSpPr txBox="1"/>
-          <p:nvPr/>
-        </p:nvSpPr>
-        <p:spPr>
-          <a:xfrm>
-            <a:off x="11155680" y="6446520"/>
-            <a:ext cx="457200" cy="292608"/>
-          </a:xfrm>
-          <a:prstGeom prst="rect">
-            <a:avLst/>
-          </a:prstGeom>
-          <a:noFill/>
-          <a:ln/>
-        </p:spPr>
-        <p:txBody>
-          <a:bodyPr wrap="square" lIns="0" tIns="0" rIns="0" bIns="0" rtlCol="0" anchor="ctr"/>
-          <a:lstStyle/>
-          <a:p>
-            <a:pPr algn="r" indent="0" marL="0">
-              <a:buNone/>
-            </a:pPr>
-            <a:r>
-              <a:rPr lang="en-US" sz="900" dirty="0">
-                <a:solidFill>
-                  <a:srgbClr val="5D5D72"/>
-                </a:solidFill>
-                <a:latin typeface="Calibri" pitchFamily="34" charset="0"/>
-                <a:ea typeface="Calibri" pitchFamily="34" charset="-122"/>
-                <a:cs typeface="Calibri" pitchFamily="34" charset="-120"/>
-              </a:rPr>
-              <a:t>11</a:t>
-            </a:r>
-            <a:endParaRPr lang="en-US" sz="900" dirty="0"/>
+          <p:cNvPr id="26" name="cuinotes-footer-mark"/>
+          <p:cNvSpPr txBox="1"/>
+          <p:nvPr/>
+        </p:nvSpPr>
+        <p:spPr>
+          <a:xfrm>
+            <a:off x="9951720" y="6455664"/>
+            <a:ext cx="2011680" cy="292608"/>
+          </a:xfrm>
+          <a:prstGeom prst="rect">
+            <a:avLst/>
+          </a:prstGeom>
+          <a:noFill/>
+        </p:spPr>
+        <p:txBody>
+          <a:bodyPr wrap="none" lIns="0" rIns="0" tIns="0" bIns="0">
+            <a:spAutoFit/>
+          </a:bodyPr>
+          <a:lstStyle/>
+          <a:p>
+            <a:pPr algn="r"/>
+            <a:r>
+              <a:rPr sz="1000">
+                <a:solidFill>
+                  <a:srgbClr val="8A939B"/>
+                </a:solidFill>
+                <a:hlinkClick r:id="rId3"/>
+              </a:rPr>
+              <a:t>cuinotes.com</a:t>
+            </a:r>
+            <a:r>
+              <a:rPr sz="1000">
+                <a:solidFill>
+                  <a:srgbClr val="8A939B"/>
+                </a:solidFill>
+              </a:rPr>
+              <a:t>  ·  11</a:t>
+            </a:r>
           </a:p>
         </p:txBody>
       </p:sp>
@@ -5852,79 +5803,44 @@
       </p:sp>
       <p:sp>
         <p:nvSpPr>
-          <p:cNvPr id="6" name="Text 3"/>
-          <p:cNvSpPr txBox="1"/>
-          <p:nvPr/>
-        </p:nvSpPr>
-        <p:spPr>
-          <a:xfrm>
-            <a:off x="640080" y="6446520"/>
-            <a:ext cx="8686800" cy="292608"/>
-          </a:xfrm>
-          <a:prstGeom prst="rect">
-            <a:avLst/>
-          </a:prstGeom>
-          <a:noFill/>
-          <a:ln/>
-        </p:spPr>
-        <p:txBody>
-          <a:bodyPr wrap="square" lIns="0" tIns="0" rIns="0" bIns="0" rtlCol="0" anchor="ctr"/>
-          <a:lstStyle/>
-          <a:p>
-            <a:pPr algn="l" indent="0" marL="0">
-              <a:buNone/>
-            </a:pPr>
-            <a:r>
-              <a:rPr lang="en-US" sz="900" dirty="0">
-                <a:solidFill>
-                  <a:srgbClr val="5D5D72"/>
-                </a:solidFill>
-                <a:latin typeface="Calibri" pitchFamily="34" charset="0"/>
-                <a:ea typeface="Calibri" pitchFamily="34" charset="-122"/>
-                <a:cs typeface="Calibri" pitchFamily="34" charset="-120"/>
-              </a:rPr>
-              <a:t>Usman Akram  •  COMSATS University Islamabad</a:t>
-            </a:r>
-            <a:endParaRPr lang="en-US" sz="900" dirty="0"/>
-          </a:p>
-        </p:txBody>
-      </p:sp>
-      <p:sp>
-        <p:nvSpPr>
-          <p:cNvPr id="7" name="Text 4"/>
-          <p:cNvSpPr txBox="1"/>
-          <p:nvPr/>
-        </p:nvSpPr>
-        <p:spPr>
-          <a:xfrm>
-            <a:off x="11155680" y="6446520"/>
-            <a:ext cx="457200" cy="292608"/>
-          </a:xfrm>
-          <a:prstGeom prst="rect">
-            <a:avLst/>
-          </a:prstGeom>
-          <a:noFill/>
-          <a:ln/>
-        </p:spPr>
-        <p:txBody>
-          <a:bodyPr wrap="square" lIns="0" tIns="0" rIns="0" bIns="0" rtlCol="0" anchor="ctr"/>
-          <a:lstStyle/>
-          <a:p>
-            <a:pPr algn="r" indent="0" marL="0">
-              <a:buNone/>
-            </a:pPr>
-            <a:r>
-              <a:rPr lang="en-US" sz="900" dirty="0">
-                <a:solidFill>
-                  <a:srgbClr val="5D5D72"/>
-                </a:solidFill>
-                <a:latin typeface="Calibri" pitchFamily="34" charset="0"/>
-                <a:ea typeface="Calibri" pitchFamily="34" charset="-122"/>
-                <a:cs typeface="Calibri" pitchFamily="34" charset="-120"/>
-              </a:rPr>
-              <a:t>12</a:t>
-            </a:r>
-            <a:endParaRPr lang="en-US" sz="900" dirty="0"/>
+          <p:cNvPr id="14" name="cuinotes-footer-mark"/>
+          <p:cNvSpPr txBox="1"/>
+          <p:nvPr/>
+        </p:nvSpPr>
+        <p:spPr>
+          <a:xfrm>
+            <a:off x="9951720" y="6455664"/>
+            <a:ext cx="2011680" cy="292608"/>
+          </a:xfrm>
+          <a:prstGeom prst="rect">
+            <a:avLst/>
+          </a:prstGeom>
+          <a:noFill/>
+        </p:spPr>
+        <p:txBody>
+          <a:bodyPr wrap="none" lIns="0" rIns="0" tIns="0" bIns="0">
+            <a:spAutoFit/>
+          </a:bodyPr>
+          <a:lstStyle/>
+          <a:p>
+            <a:pPr algn="r"/>
+            <a:r>
+              <a:rPr sz="1000">
+                <a:solidFill>
+                  <a:srgbClr val="8A939B"/>
+                </a:solidFill>
+                <a:hlinkClick r:id="rId3"/>
+              </a:rPr>
+              <a:t>cuinotes.com</a:t>
+            </a:r>
+            <a:r>
+              <a:rPr sz="1000">
+                <a:solidFill>
+                  <a:srgbClr val="8A939B"/>
+                </a:solidFill>
+              </a:rPr>
+              <a:t>  ·  12</a:t>
+            </a:r>
           </a:p>
         </p:txBody>
       </p:sp>
@@ -6059,6 +5975,10 @@
           </a:solidFill>
           <a:ln/>
         </p:spPr>
+        <p:txBody>
+          <a:bodyPr/>
+          <a:p/>
+        </p:txBody>
       </p:sp>
       <p:sp>
         <p:nvSpPr>
@@ -6161,6 +6081,10 @@
             <a:tailEnd type="triangle"/>
           </a:ln>
         </p:spPr>
+        <p:txBody>
+          <a:bodyPr/>
+          <a:p/>
+        </p:txBody>
       </p:sp>
       <p:sp>
         <p:nvSpPr>
@@ -6183,6 +6107,10 @@
           </a:solidFill>
           <a:ln/>
         </p:spPr>
+        <p:txBody>
+          <a:bodyPr/>
+          <a:p/>
+        </p:txBody>
       </p:sp>
       <p:sp>
         <p:nvSpPr>
@@ -6285,6 +6213,10 @@
             <a:tailEnd type="triangle"/>
           </a:ln>
         </p:spPr>
+        <p:txBody>
+          <a:bodyPr/>
+          <a:p/>
+        </p:txBody>
       </p:sp>
       <p:sp>
         <p:nvSpPr>
@@ -6307,6 +6239,10 @@
           </a:solidFill>
           <a:ln/>
         </p:spPr>
+        <p:txBody>
+          <a:bodyPr/>
+          <a:p/>
+        </p:txBody>
       </p:sp>
       <p:sp>
         <p:nvSpPr>
@@ -6466,79 +6402,44 @@
       </p:sp>
       <p:sp>
         <p:nvSpPr>
-          <p:cNvPr id="17" name="Text 15"/>
-          <p:cNvSpPr txBox="1"/>
-          <p:nvPr/>
-        </p:nvSpPr>
-        <p:spPr>
-          <a:xfrm>
-            <a:off x="640080" y="6446520"/>
-            <a:ext cx="8686800" cy="292608"/>
-          </a:xfrm>
-          <a:prstGeom prst="rect">
-            <a:avLst/>
-          </a:prstGeom>
-          <a:noFill/>
-          <a:ln/>
-        </p:spPr>
-        <p:txBody>
-          <a:bodyPr wrap="square" lIns="0" tIns="0" rIns="0" bIns="0" rtlCol="0" anchor="ctr"/>
-          <a:lstStyle/>
-          <a:p>
-            <a:pPr algn="l" indent="0" marL="0">
-              <a:buNone/>
-            </a:pPr>
-            <a:r>
-              <a:rPr lang="en-US" sz="900" dirty="0">
-                <a:solidFill>
-                  <a:srgbClr val="5D5D72"/>
-                </a:solidFill>
-                <a:latin typeface="Calibri" pitchFamily="34" charset="0"/>
-                <a:ea typeface="Calibri" pitchFamily="34" charset="-122"/>
-                <a:cs typeface="Calibri" pitchFamily="34" charset="-120"/>
-              </a:rPr>
-              <a:t>Usman Akram  •  COMSATS University Islamabad</a:t>
-            </a:r>
-            <a:endParaRPr lang="en-US" sz="900" dirty="0"/>
-          </a:p>
-        </p:txBody>
-      </p:sp>
-      <p:sp>
-        <p:nvSpPr>
-          <p:cNvPr id="18" name="Text 16"/>
-          <p:cNvSpPr txBox="1"/>
-          <p:nvPr/>
-        </p:nvSpPr>
-        <p:spPr>
-          <a:xfrm>
-            <a:off x="11155680" y="6446520"/>
-            <a:ext cx="457200" cy="292608"/>
-          </a:xfrm>
-          <a:prstGeom prst="rect">
-            <a:avLst/>
-          </a:prstGeom>
-          <a:noFill/>
-          <a:ln/>
-        </p:spPr>
-        <p:txBody>
-          <a:bodyPr wrap="square" lIns="0" tIns="0" rIns="0" bIns="0" rtlCol="0" anchor="ctr"/>
-          <a:lstStyle/>
-          <a:p>
-            <a:pPr algn="r" indent="0" marL="0">
-              <a:buNone/>
-            </a:pPr>
-            <a:r>
-              <a:rPr lang="en-US" sz="900" dirty="0">
-                <a:solidFill>
-                  <a:srgbClr val="5D5D72"/>
-                </a:solidFill>
-                <a:latin typeface="Calibri" pitchFamily="34" charset="0"/>
-                <a:ea typeface="Calibri" pitchFamily="34" charset="-122"/>
-                <a:cs typeface="Calibri" pitchFamily="34" charset="-120"/>
-              </a:rPr>
-              <a:t>13</a:t>
-            </a:r>
-            <a:endParaRPr lang="en-US" sz="900" dirty="0"/>
+          <p:cNvPr id="19" name="cuinotes-footer-mark"/>
+          <p:cNvSpPr txBox="1"/>
+          <p:nvPr/>
+        </p:nvSpPr>
+        <p:spPr>
+          <a:xfrm>
+            <a:off x="9951720" y="6455664"/>
+            <a:ext cx="2011680" cy="292608"/>
+          </a:xfrm>
+          <a:prstGeom prst="rect">
+            <a:avLst/>
+          </a:prstGeom>
+          <a:noFill/>
+        </p:spPr>
+        <p:txBody>
+          <a:bodyPr wrap="none" lIns="0" rIns="0" tIns="0" bIns="0">
+            <a:spAutoFit/>
+          </a:bodyPr>
+          <a:lstStyle/>
+          <a:p>
+            <a:pPr algn="r"/>
+            <a:r>
+              <a:rPr sz="1000">
+                <a:solidFill>
+                  <a:srgbClr val="8A939B"/>
+                </a:solidFill>
+                <a:hlinkClick r:id="rId3"/>
+              </a:rPr>
+              <a:t>cuinotes.com</a:t>
+            </a:r>
+            <a:r>
+              <a:rPr sz="1000">
+                <a:solidFill>
+                  <a:srgbClr val="8A939B"/>
+                </a:solidFill>
+              </a:rPr>
+              <a:t>  ·  13</a:t>
+            </a:r>
           </a:p>
         </p:txBody>
       </p:sp>
@@ -6717,6 +6618,10 @@
             <a:prstDash val="solid"/>
           </a:ln>
         </p:spPr>
+        <p:txBody>
+          <a:bodyPr/>
+          <a:p/>
+        </p:txBody>
       </p:sp>
       <p:sp>
         <p:nvSpPr>
@@ -6861,6 +6766,10 @@
             <a:prstDash val="solid"/>
           </a:ln>
         </p:spPr>
+        <p:txBody>
+          <a:bodyPr/>
+          <a:p/>
+        </p:txBody>
       </p:sp>
       <p:sp>
         <p:nvSpPr>
@@ -7005,6 +6914,10 @@
             <a:prstDash val="solid"/>
           </a:ln>
         </p:spPr>
+        <p:txBody>
+          <a:bodyPr/>
+          <a:p/>
+        </p:txBody>
       </p:sp>
       <p:sp>
         <p:nvSpPr>
@@ -7149,6 +7062,10 @@
             <a:prstDash val="solid"/>
           </a:ln>
         </p:spPr>
+        <p:txBody>
+          <a:bodyPr/>
+          <a:p/>
+        </p:txBody>
       </p:sp>
       <p:sp>
         <p:nvSpPr>
@@ -7293,6 +7210,10 @@
             <a:prstDash val="solid"/>
           </a:ln>
         </p:spPr>
+        <p:txBody>
+          <a:bodyPr/>
+          <a:p/>
+        </p:txBody>
       </p:sp>
       <p:sp>
         <p:nvSpPr>
@@ -7437,6 +7358,10 @@
             <a:prstDash val="solid"/>
           </a:ln>
         </p:spPr>
+        <p:txBody>
+          <a:bodyPr/>
+          <a:p/>
+        </p:txBody>
       </p:sp>
       <p:sp>
         <p:nvSpPr>
@@ -7518,79 +7443,44 @@
       </p:sp>
       <p:sp>
         <p:nvSpPr>
-          <p:cNvPr id="28" name="Text 26"/>
-          <p:cNvSpPr txBox="1"/>
-          <p:nvPr/>
-        </p:nvSpPr>
-        <p:spPr>
-          <a:xfrm>
-            <a:off x="640080" y="6446520"/>
-            <a:ext cx="8686800" cy="292608"/>
-          </a:xfrm>
-          <a:prstGeom prst="rect">
-            <a:avLst/>
-          </a:prstGeom>
-          <a:noFill/>
-          <a:ln/>
-        </p:spPr>
-        <p:txBody>
-          <a:bodyPr wrap="square" lIns="0" tIns="0" rIns="0" bIns="0" rtlCol="0" anchor="ctr"/>
-          <a:lstStyle/>
-          <a:p>
-            <a:pPr algn="l" indent="0" marL="0">
-              <a:buNone/>
-            </a:pPr>
-            <a:r>
-              <a:rPr lang="en-US" sz="900" dirty="0">
-                <a:solidFill>
-                  <a:srgbClr val="5D5D72"/>
-                </a:solidFill>
-                <a:latin typeface="Calibri" pitchFamily="34" charset="0"/>
-                <a:ea typeface="Calibri" pitchFamily="34" charset="-122"/>
-                <a:cs typeface="Calibri" pitchFamily="34" charset="-120"/>
-              </a:rPr>
-              <a:t>Usman Akram  •  COMSATS University Islamabad</a:t>
-            </a:r>
-            <a:endParaRPr lang="en-US" sz="900" dirty="0"/>
-          </a:p>
-        </p:txBody>
-      </p:sp>
-      <p:sp>
-        <p:nvSpPr>
-          <p:cNvPr id="29" name="Text 27"/>
-          <p:cNvSpPr txBox="1"/>
-          <p:nvPr/>
-        </p:nvSpPr>
-        <p:spPr>
-          <a:xfrm>
-            <a:off x="11155680" y="6446520"/>
-            <a:ext cx="457200" cy="292608"/>
-          </a:xfrm>
-          <a:prstGeom prst="rect">
-            <a:avLst/>
-          </a:prstGeom>
-          <a:noFill/>
-          <a:ln/>
-        </p:spPr>
-        <p:txBody>
-          <a:bodyPr wrap="square" lIns="0" tIns="0" rIns="0" bIns="0" rtlCol="0" anchor="ctr"/>
-          <a:lstStyle/>
-          <a:p>
-            <a:pPr algn="r" indent="0" marL="0">
-              <a:buNone/>
-            </a:pPr>
-            <a:r>
-              <a:rPr lang="en-US" sz="900" dirty="0">
-                <a:solidFill>
-                  <a:srgbClr val="5D5D72"/>
-                </a:solidFill>
-                <a:latin typeface="Calibri" pitchFamily="34" charset="0"/>
-                <a:ea typeface="Calibri" pitchFamily="34" charset="-122"/>
-                <a:cs typeface="Calibri" pitchFamily="34" charset="-120"/>
-              </a:rPr>
-              <a:t>14</a:t>
-            </a:r>
-            <a:endParaRPr lang="en-US" sz="900" dirty="0"/>
+          <p:cNvPr id="30" name="cuinotes-footer-mark"/>
+          <p:cNvSpPr txBox="1"/>
+          <p:nvPr/>
+        </p:nvSpPr>
+        <p:spPr>
+          <a:xfrm>
+            <a:off x="9951720" y="6455664"/>
+            <a:ext cx="2011680" cy="292608"/>
+          </a:xfrm>
+          <a:prstGeom prst="rect">
+            <a:avLst/>
+          </a:prstGeom>
+          <a:noFill/>
+        </p:spPr>
+        <p:txBody>
+          <a:bodyPr wrap="none" lIns="0" rIns="0" tIns="0" bIns="0">
+            <a:spAutoFit/>
+          </a:bodyPr>
+          <a:lstStyle/>
+          <a:p>
+            <a:pPr algn="r"/>
+            <a:r>
+              <a:rPr sz="1000">
+                <a:solidFill>
+                  <a:srgbClr val="8A939B"/>
+                </a:solidFill>
+                <a:hlinkClick r:id="rId3"/>
+              </a:rPr>
+              <a:t>cuinotes.com</a:t>
+            </a:r>
+            <a:r>
+              <a:rPr sz="1000">
+                <a:solidFill>
+                  <a:srgbClr val="8A939B"/>
+                </a:solidFill>
+              </a:rPr>
+              <a:t>  ·  14</a:t>
+            </a:r>
           </a:p>
         </p:txBody>
       </p:sp>
@@ -7764,6 +7654,10 @@
           </a:solidFill>
           <a:ln/>
         </p:spPr>
+        <p:txBody>
+          <a:bodyPr/>
+          <a:p/>
+        </p:txBody>
       </p:sp>
       <p:sp>
         <p:nvSpPr>
@@ -7864,6 +7758,10 @@
           </a:solidFill>
           <a:ln/>
         </p:spPr>
+        <p:txBody>
+          <a:bodyPr/>
+          <a:p/>
+        </p:txBody>
       </p:sp>
       <p:sp>
         <p:nvSpPr>
@@ -7964,6 +7862,10 @@
           </a:solidFill>
           <a:ln/>
         </p:spPr>
+        <p:txBody>
+          <a:bodyPr/>
+          <a:p/>
+        </p:txBody>
       </p:sp>
       <p:sp>
         <p:nvSpPr>
@@ -8064,6 +7966,10 @@
           </a:solidFill>
           <a:ln/>
         </p:spPr>
+        <p:txBody>
+          <a:bodyPr/>
+          <a:p/>
+        </p:txBody>
       </p:sp>
       <p:sp>
         <p:nvSpPr>
@@ -8164,6 +8070,10 @@
           </a:solidFill>
           <a:ln/>
         </p:spPr>
+        <p:txBody>
+          <a:bodyPr/>
+          <a:p/>
+        </p:txBody>
       </p:sp>
       <p:sp>
         <p:nvSpPr>
@@ -8284,79 +8194,44 @@
       </p:sp>
       <p:sp>
         <p:nvSpPr>
-          <p:cNvPr id="21" name="Text 19"/>
-          <p:cNvSpPr txBox="1"/>
-          <p:nvPr/>
-        </p:nvSpPr>
-        <p:spPr>
-          <a:xfrm>
-            <a:off x="640080" y="6446520"/>
-            <a:ext cx="8686800" cy="292608"/>
-          </a:xfrm>
-          <a:prstGeom prst="rect">
-            <a:avLst/>
-          </a:prstGeom>
-          <a:noFill/>
-          <a:ln/>
-        </p:spPr>
-        <p:txBody>
-          <a:bodyPr wrap="square" lIns="0" tIns="0" rIns="0" bIns="0" rtlCol="0" anchor="ctr"/>
-          <a:lstStyle/>
-          <a:p>
-            <a:pPr algn="l" indent="0" marL="0">
-              <a:buNone/>
-            </a:pPr>
-            <a:r>
-              <a:rPr lang="en-US" sz="900" dirty="0">
-                <a:solidFill>
-                  <a:srgbClr val="5D5D72"/>
-                </a:solidFill>
-                <a:latin typeface="Calibri" pitchFamily="34" charset="0"/>
-                <a:ea typeface="Calibri" pitchFamily="34" charset="-122"/>
-                <a:cs typeface="Calibri" pitchFamily="34" charset="-120"/>
-              </a:rPr>
-              <a:t>Usman Akram  •  COMSATS University Islamabad</a:t>
-            </a:r>
-            <a:endParaRPr lang="en-US" sz="900" dirty="0"/>
-          </a:p>
-        </p:txBody>
-      </p:sp>
-      <p:sp>
-        <p:nvSpPr>
-          <p:cNvPr id="22" name="Text 20"/>
-          <p:cNvSpPr txBox="1"/>
-          <p:nvPr/>
-        </p:nvSpPr>
-        <p:spPr>
-          <a:xfrm>
-            <a:off x="11155680" y="6446520"/>
-            <a:ext cx="457200" cy="292608"/>
-          </a:xfrm>
-          <a:prstGeom prst="rect">
-            <a:avLst/>
-          </a:prstGeom>
-          <a:noFill/>
-          <a:ln/>
-        </p:spPr>
-        <p:txBody>
-          <a:bodyPr wrap="square" lIns="0" tIns="0" rIns="0" bIns="0" rtlCol="0" anchor="ctr"/>
-          <a:lstStyle/>
-          <a:p>
-            <a:pPr algn="r" indent="0" marL="0">
-              <a:buNone/>
-            </a:pPr>
-            <a:r>
-              <a:rPr lang="en-US" sz="900" dirty="0">
-                <a:solidFill>
-                  <a:srgbClr val="5D5D72"/>
-                </a:solidFill>
-                <a:latin typeface="Calibri" pitchFamily="34" charset="0"/>
-                <a:ea typeface="Calibri" pitchFamily="34" charset="-122"/>
-                <a:cs typeface="Calibri" pitchFamily="34" charset="-120"/>
-              </a:rPr>
-              <a:t>15</a:t>
-            </a:r>
-            <a:endParaRPr lang="en-US" sz="900" dirty="0"/>
+          <p:cNvPr id="23" name="cuinotes-footer-mark"/>
+          <p:cNvSpPr txBox="1"/>
+          <p:nvPr/>
+        </p:nvSpPr>
+        <p:spPr>
+          <a:xfrm>
+            <a:off x="9951720" y="6455664"/>
+            <a:ext cx="2011680" cy="292608"/>
+          </a:xfrm>
+          <a:prstGeom prst="rect">
+            <a:avLst/>
+          </a:prstGeom>
+          <a:noFill/>
+        </p:spPr>
+        <p:txBody>
+          <a:bodyPr wrap="none" lIns="0" rIns="0" tIns="0" bIns="0">
+            <a:spAutoFit/>
+          </a:bodyPr>
+          <a:lstStyle/>
+          <a:p>
+            <a:pPr algn="r"/>
+            <a:r>
+              <a:rPr sz="1000">
+                <a:solidFill>
+                  <a:srgbClr val="8A939B"/>
+                </a:solidFill>
+                <a:hlinkClick r:id="rId3"/>
+              </a:rPr>
+              <a:t>cuinotes.com</a:t>
+            </a:r>
+            <a:r>
+              <a:rPr sz="1000">
+                <a:solidFill>
+                  <a:srgbClr val="8A939B"/>
+                </a:solidFill>
+              </a:rPr>
+              <a:t>  ·  15</a:t>
+            </a:r>
           </a:p>
         </p:txBody>
       </p:sp>
@@ -8489,6 +8364,10 @@
           </a:solidFill>
           <a:ln/>
         </p:spPr>
+        <p:txBody>
+          <a:bodyPr/>
+          <a:p/>
+        </p:txBody>
       </p:sp>
       <p:sp>
         <p:nvSpPr>
@@ -8587,6 +8466,10 @@
           </a:solidFill>
           <a:ln/>
         </p:spPr>
+        <p:txBody>
+          <a:bodyPr/>
+          <a:p/>
+        </p:txBody>
       </p:sp>
       <p:sp>
         <p:nvSpPr>
@@ -8685,6 +8568,10 @@
           </a:solidFill>
           <a:ln/>
         </p:spPr>
+        <p:txBody>
+          <a:bodyPr/>
+          <a:p/>
+        </p:txBody>
       </p:sp>
       <p:sp>
         <p:nvSpPr>
@@ -8783,6 +8670,10 @@
           </a:solidFill>
           <a:ln/>
         </p:spPr>
+        <p:txBody>
+          <a:bodyPr/>
+          <a:p/>
+        </p:txBody>
       </p:sp>
       <p:sp>
         <p:nvSpPr>
@@ -8881,6 +8772,10 @@
           </a:solidFill>
           <a:ln/>
         </p:spPr>
+        <p:txBody>
+          <a:bodyPr/>
+          <a:p/>
+        </p:txBody>
       </p:sp>
       <p:sp>
         <p:nvSpPr>
@@ -8979,6 +8874,10 @@
           </a:solidFill>
           <a:ln/>
         </p:spPr>
+        <p:txBody>
+          <a:bodyPr/>
+          <a:p/>
+        </p:txBody>
       </p:sp>
       <p:sp>
         <p:nvSpPr>
@@ -9060,79 +8959,44 @@
       </p:sp>
       <p:sp>
         <p:nvSpPr>
-          <p:cNvPr id="22" name="Text 20"/>
-          <p:cNvSpPr txBox="1"/>
-          <p:nvPr/>
-        </p:nvSpPr>
-        <p:spPr>
-          <a:xfrm>
-            <a:off x="640080" y="6446520"/>
-            <a:ext cx="8686800" cy="292608"/>
-          </a:xfrm>
-          <a:prstGeom prst="rect">
-            <a:avLst/>
-          </a:prstGeom>
-          <a:noFill/>
-          <a:ln/>
-        </p:spPr>
-        <p:txBody>
-          <a:bodyPr wrap="square" lIns="0" tIns="0" rIns="0" bIns="0" rtlCol="0" anchor="ctr"/>
-          <a:lstStyle/>
-          <a:p>
-            <a:pPr algn="l" indent="0" marL="0">
-              <a:buNone/>
-            </a:pPr>
-            <a:r>
-              <a:rPr lang="en-US" sz="900" dirty="0">
-                <a:solidFill>
-                  <a:srgbClr val="9AA3D8"/>
-                </a:solidFill>
-                <a:latin typeface="Calibri" pitchFamily="34" charset="0"/>
-                <a:ea typeface="Calibri" pitchFamily="34" charset="-122"/>
-                <a:cs typeface="Calibri" pitchFamily="34" charset="-120"/>
-              </a:rPr>
-              <a:t>Usman Akram  •  COMSATS University Islamabad</a:t>
-            </a:r>
-            <a:endParaRPr lang="en-US" sz="900" dirty="0"/>
-          </a:p>
-        </p:txBody>
-      </p:sp>
-      <p:sp>
-        <p:nvSpPr>
-          <p:cNvPr id="23" name="Text 21"/>
-          <p:cNvSpPr txBox="1"/>
-          <p:nvPr/>
-        </p:nvSpPr>
-        <p:spPr>
-          <a:xfrm>
-            <a:off x="11155680" y="6446520"/>
-            <a:ext cx="457200" cy="292608"/>
-          </a:xfrm>
-          <a:prstGeom prst="rect">
-            <a:avLst/>
-          </a:prstGeom>
-          <a:noFill/>
-          <a:ln/>
-        </p:spPr>
-        <p:txBody>
-          <a:bodyPr wrap="square" lIns="0" tIns="0" rIns="0" bIns="0" rtlCol="0" anchor="ctr"/>
-          <a:lstStyle/>
-          <a:p>
-            <a:pPr algn="r" indent="0" marL="0">
-              <a:buNone/>
-            </a:pPr>
-            <a:r>
-              <a:rPr lang="en-US" sz="900" dirty="0">
-                <a:solidFill>
-                  <a:srgbClr val="9AA3D8"/>
-                </a:solidFill>
-                <a:latin typeface="Calibri" pitchFamily="34" charset="0"/>
-                <a:ea typeface="Calibri" pitchFamily="34" charset="-122"/>
-                <a:cs typeface="Calibri" pitchFamily="34" charset="-120"/>
-              </a:rPr>
-              <a:t>16</a:t>
-            </a:r>
-            <a:endParaRPr lang="en-US" sz="900" dirty="0"/>
+          <p:cNvPr id="24" name="cuinotes-footer-mark"/>
+          <p:cNvSpPr txBox="1"/>
+          <p:nvPr/>
+        </p:nvSpPr>
+        <p:spPr>
+          <a:xfrm>
+            <a:off x="9951720" y="6455664"/>
+            <a:ext cx="2011680" cy="292608"/>
+          </a:xfrm>
+          <a:prstGeom prst="rect">
+            <a:avLst/>
+          </a:prstGeom>
+          <a:noFill/>
+        </p:spPr>
+        <p:txBody>
+          <a:bodyPr wrap="none" lIns="0" rIns="0" tIns="0" bIns="0">
+            <a:spAutoFit/>
+          </a:bodyPr>
+          <a:lstStyle/>
+          <a:p>
+            <a:pPr algn="r"/>
+            <a:r>
+              <a:rPr sz="1000">
+                <a:solidFill>
+                  <a:srgbClr val="8A939B"/>
+                </a:solidFill>
+                <a:hlinkClick r:id="rId3"/>
+              </a:rPr>
+              <a:t>cuinotes.com</a:t>
+            </a:r>
+            <a:r>
+              <a:rPr sz="1000">
+                <a:solidFill>
+                  <a:srgbClr val="8A939B"/>
+                </a:solidFill>
+              </a:rPr>
+              <a:t>  ·  16</a:t>
+            </a:r>
           </a:p>
         </p:txBody>
       </p:sp>
@@ -9265,6 +9129,10 @@
           </a:solidFill>
           <a:ln/>
         </p:spPr>
+        <p:txBody>
+          <a:bodyPr/>
+          <a:p/>
+        </p:txBody>
       </p:sp>
       <p:sp>
         <p:nvSpPr>
@@ -9363,6 +9231,10 @@
           </a:solidFill>
           <a:ln/>
         </p:spPr>
+        <p:txBody>
+          <a:bodyPr/>
+          <a:p/>
+        </p:txBody>
       </p:sp>
       <p:sp>
         <p:nvSpPr>
@@ -9461,6 +9333,10 @@
           </a:solidFill>
           <a:ln/>
         </p:spPr>
+        <p:txBody>
+          <a:bodyPr/>
+          <a:p/>
+        </p:txBody>
       </p:sp>
       <p:sp>
         <p:nvSpPr>
@@ -9559,6 +9435,10 @@
           </a:solidFill>
           <a:ln/>
         </p:spPr>
+        <p:txBody>
+          <a:bodyPr/>
+          <a:p/>
+        </p:txBody>
       </p:sp>
       <p:sp>
         <p:nvSpPr>
@@ -9657,6 +9537,10 @@
           </a:solidFill>
           <a:ln/>
         </p:spPr>
+        <p:txBody>
+          <a:bodyPr/>
+          <a:p/>
+        </p:txBody>
       </p:sp>
       <p:sp>
         <p:nvSpPr>
@@ -9755,6 +9639,10 @@
           </a:solidFill>
           <a:ln/>
         </p:spPr>
+        <p:txBody>
+          <a:bodyPr/>
+          <a:p/>
+        </p:txBody>
       </p:sp>
       <p:sp>
         <p:nvSpPr>
@@ -9836,79 +9724,44 @@
       </p:sp>
       <p:sp>
         <p:nvSpPr>
-          <p:cNvPr id="22" name="Text 20"/>
-          <p:cNvSpPr txBox="1"/>
-          <p:nvPr/>
-        </p:nvSpPr>
-        <p:spPr>
-          <a:xfrm>
-            <a:off x="640080" y="6446520"/>
-            <a:ext cx="8686800" cy="292608"/>
-          </a:xfrm>
-          <a:prstGeom prst="rect">
-            <a:avLst/>
-          </a:prstGeom>
-          <a:noFill/>
-          <a:ln/>
-        </p:spPr>
-        <p:txBody>
-          <a:bodyPr wrap="square" lIns="0" tIns="0" rIns="0" bIns="0" rtlCol="0" anchor="ctr"/>
-          <a:lstStyle/>
-          <a:p>
-            <a:pPr algn="l" indent="0" marL="0">
-              <a:buNone/>
-            </a:pPr>
-            <a:r>
-              <a:rPr lang="en-US" sz="900" dirty="0">
-                <a:solidFill>
-                  <a:srgbClr val="5D5D72"/>
-                </a:solidFill>
-                <a:latin typeface="Calibri" pitchFamily="34" charset="0"/>
-                <a:ea typeface="Calibri" pitchFamily="34" charset="-122"/>
-                <a:cs typeface="Calibri" pitchFamily="34" charset="-120"/>
-              </a:rPr>
-              <a:t>Usman Akram  •  COMSATS University Islamabad</a:t>
-            </a:r>
-            <a:endParaRPr lang="en-US" sz="900" dirty="0"/>
-          </a:p>
-        </p:txBody>
-      </p:sp>
-      <p:sp>
-        <p:nvSpPr>
-          <p:cNvPr id="23" name="Text 21"/>
-          <p:cNvSpPr txBox="1"/>
-          <p:nvPr/>
-        </p:nvSpPr>
-        <p:spPr>
-          <a:xfrm>
-            <a:off x="11155680" y="6446520"/>
-            <a:ext cx="457200" cy="292608"/>
-          </a:xfrm>
-          <a:prstGeom prst="rect">
-            <a:avLst/>
-          </a:prstGeom>
-          <a:noFill/>
-          <a:ln/>
-        </p:spPr>
-        <p:txBody>
-          <a:bodyPr wrap="square" lIns="0" tIns="0" rIns="0" bIns="0" rtlCol="0" anchor="ctr"/>
-          <a:lstStyle/>
-          <a:p>
-            <a:pPr algn="r" indent="0" marL="0">
-              <a:buNone/>
-            </a:pPr>
-            <a:r>
-              <a:rPr lang="en-US" sz="900" dirty="0">
-                <a:solidFill>
-                  <a:srgbClr val="5D5D72"/>
-                </a:solidFill>
-                <a:latin typeface="Calibri" pitchFamily="34" charset="0"/>
-                <a:ea typeface="Calibri" pitchFamily="34" charset="-122"/>
-                <a:cs typeface="Calibri" pitchFamily="34" charset="-120"/>
-              </a:rPr>
-              <a:t>2</a:t>
-            </a:r>
-            <a:endParaRPr lang="en-US" sz="900" dirty="0"/>
+          <p:cNvPr id="24" name="cuinotes-footer-mark"/>
+          <p:cNvSpPr txBox="1"/>
+          <p:nvPr/>
+        </p:nvSpPr>
+        <p:spPr>
+          <a:xfrm>
+            <a:off x="9951720" y="6455664"/>
+            <a:ext cx="2011680" cy="292608"/>
+          </a:xfrm>
+          <a:prstGeom prst="rect">
+            <a:avLst/>
+          </a:prstGeom>
+          <a:noFill/>
+        </p:spPr>
+        <p:txBody>
+          <a:bodyPr wrap="none" lIns="0" rIns="0" tIns="0" bIns="0">
+            <a:spAutoFit/>
+          </a:bodyPr>
+          <a:lstStyle/>
+          <a:p>
+            <a:pPr algn="r"/>
+            <a:r>
+              <a:rPr sz="1000">
+                <a:solidFill>
+                  <a:srgbClr val="8A939B"/>
+                </a:solidFill>
+                <a:hlinkClick r:id="rId3"/>
+              </a:rPr>
+              <a:t>cuinotes.com</a:t>
+            </a:r>
+            <a:r>
+              <a:rPr sz="1000">
+                <a:solidFill>
+                  <a:srgbClr val="8A939B"/>
+                </a:solidFill>
+              </a:rPr>
+              <a:t>  ·  2</a:t>
+            </a:r>
           </a:p>
         </p:txBody>
       </p:sp>
@@ -10087,6 +9940,10 @@
             <a:prstDash val="solid"/>
           </a:ln>
         </p:spPr>
+        <p:txBody>
+          <a:bodyPr/>
+          <a:p/>
+        </p:txBody>
       </p:sp>
       <p:sp>
         <p:nvSpPr>
@@ -10259,6 +10116,10 @@
             <a:prstDash val="solid"/>
           </a:ln>
         </p:spPr>
+        <p:txBody>
+          <a:bodyPr/>
+          <a:p/>
+        </p:txBody>
       </p:sp>
       <p:sp>
         <p:nvSpPr>
@@ -10407,79 +10268,44 @@
       </p:sp>
       <p:sp>
         <p:nvSpPr>
-          <p:cNvPr id="11" name="Text 9"/>
-          <p:cNvSpPr txBox="1"/>
-          <p:nvPr/>
-        </p:nvSpPr>
-        <p:spPr>
-          <a:xfrm>
-            <a:off x="640080" y="6446520"/>
-            <a:ext cx="8686800" cy="292608"/>
-          </a:xfrm>
-          <a:prstGeom prst="rect">
-            <a:avLst/>
-          </a:prstGeom>
-          <a:noFill/>
-          <a:ln/>
-        </p:spPr>
-        <p:txBody>
-          <a:bodyPr wrap="square" lIns="0" tIns="0" rIns="0" bIns="0" rtlCol="0" anchor="ctr"/>
-          <a:lstStyle/>
-          <a:p>
-            <a:pPr algn="l" indent="0" marL="0">
-              <a:buNone/>
-            </a:pPr>
-            <a:r>
-              <a:rPr lang="en-US" sz="900" dirty="0">
-                <a:solidFill>
-                  <a:srgbClr val="5D5D72"/>
-                </a:solidFill>
-                <a:latin typeface="Calibri" pitchFamily="34" charset="0"/>
-                <a:ea typeface="Calibri" pitchFamily="34" charset="-122"/>
-                <a:cs typeface="Calibri" pitchFamily="34" charset="-120"/>
-              </a:rPr>
-              <a:t>Usman Akram  •  COMSATS University Islamabad</a:t>
-            </a:r>
-            <a:endParaRPr lang="en-US" sz="900" dirty="0"/>
-          </a:p>
-        </p:txBody>
-      </p:sp>
-      <p:sp>
-        <p:nvSpPr>
-          <p:cNvPr id="12" name="Text 10"/>
-          <p:cNvSpPr txBox="1"/>
-          <p:nvPr/>
-        </p:nvSpPr>
-        <p:spPr>
-          <a:xfrm>
-            <a:off x="11155680" y="6446520"/>
-            <a:ext cx="457200" cy="292608"/>
-          </a:xfrm>
-          <a:prstGeom prst="rect">
-            <a:avLst/>
-          </a:prstGeom>
-          <a:noFill/>
-          <a:ln/>
-        </p:spPr>
-        <p:txBody>
-          <a:bodyPr wrap="square" lIns="0" tIns="0" rIns="0" bIns="0" rtlCol="0" anchor="ctr"/>
-          <a:lstStyle/>
-          <a:p>
-            <a:pPr algn="r" indent="0" marL="0">
-              <a:buNone/>
-            </a:pPr>
-            <a:r>
-              <a:rPr lang="en-US" sz="900" dirty="0">
-                <a:solidFill>
-                  <a:srgbClr val="5D5D72"/>
-                </a:solidFill>
-                <a:latin typeface="Calibri" pitchFamily="34" charset="0"/>
-                <a:ea typeface="Calibri" pitchFamily="34" charset="-122"/>
-                <a:cs typeface="Calibri" pitchFamily="34" charset="-120"/>
-              </a:rPr>
-              <a:t>3</a:t>
-            </a:r>
-            <a:endParaRPr lang="en-US" sz="900" dirty="0"/>
+          <p:cNvPr id="13" name="cuinotes-footer-mark"/>
+          <p:cNvSpPr txBox="1"/>
+          <p:nvPr/>
+        </p:nvSpPr>
+        <p:spPr>
+          <a:xfrm>
+            <a:off x="9951720" y="6455664"/>
+            <a:ext cx="2011680" cy="292608"/>
+          </a:xfrm>
+          <a:prstGeom prst="rect">
+            <a:avLst/>
+          </a:prstGeom>
+          <a:noFill/>
+        </p:spPr>
+        <p:txBody>
+          <a:bodyPr wrap="none" lIns="0" rIns="0" tIns="0" bIns="0">
+            <a:spAutoFit/>
+          </a:bodyPr>
+          <a:lstStyle/>
+          <a:p>
+            <a:pPr algn="r"/>
+            <a:r>
+              <a:rPr sz="1000">
+                <a:solidFill>
+                  <a:srgbClr val="8A939B"/>
+                </a:solidFill>
+                <a:hlinkClick r:id="rId3"/>
+              </a:rPr>
+              <a:t>cuinotes.com</a:t>
+            </a:r>
+            <a:r>
+              <a:rPr sz="1000">
+                <a:solidFill>
+                  <a:srgbClr val="8A939B"/>
+                </a:solidFill>
+              </a:rPr>
+              <a:t>  ·  3</a:t>
+            </a:r>
           </a:p>
         </p:txBody>
       </p:sp>
@@ -10619,6 +10445,10 @@
             <a:prstDash val="solid"/>
           </a:ln>
         </p:spPr>
+        <p:txBody>
+          <a:bodyPr/>
+          <a:p/>
+        </p:txBody>
       </p:sp>
       <p:sp>
         <p:nvSpPr>
@@ -10639,6 +10469,10 @@
           </a:solidFill>
           <a:ln/>
         </p:spPr>
+        <p:txBody>
+          <a:bodyPr/>
+          <a:p/>
+        </p:txBody>
       </p:sp>
       <p:sp>
         <p:nvSpPr>
@@ -10822,6 +10656,10 @@
             <a:prstDash val="solid"/>
           </a:ln>
         </p:spPr>
+        <p:txBody>
+          <a:bodyPr/>
+          <a:p/>
+        </p:txBody>
       </p:sp>
       <p:sp>
         <p:nvSpPr>
@@ -10842,6 +10680,10 @@
           </a:solidFill>
           <a:ln/>
         </p:spPr>
+        <p:txBody>
+          <a:bodyPr/>
+          <a:p/>
+        </p:txBody>
       </p:sp>
       <p:sp>
         <p:nvSpPr>
@@ -11025,6 +10867,10 @@
             <a:prstDash val="solid"/>
           </a:ln>
         </p:spPr>
+        <p:txBody>
+          <a:bodyPr/>
+          <a:p/>
+        </p:txBody>
       </p:sp>
       <p:sp>
         <p:nvSpPr>
@@ -11045,6 +10891,10 @@
           </a:solidFill>
           <a:ln/>
         </p:spPr>
+        <p:txBody>
+          <a:bodyPr/>
+          <a:p/>
+        </p:txBody>
       </p:sp>
       <p:sp>
         <p:nvSpPr>
@@ -11204,79 +11054,44 @@
       </p:sp>
       <p:sp>
         <p:nvSpPr>
-          <p:cNvPr id="22" name="Text 20"/>
-          <p:cNvSpPr txBox="1"/>
-          <p:nvPr/>
-        </p:nvSpPr>
-        <p:spPr>
-          <a:xfrm>
-            <a:off x="640080" y="6446520"/>
-            <a:ext cx="8686800" cy="292608"/>
-          </a:xfrm>
-          <a:prstGeom prst="rect">
-            <a:avLst/>
-          </a:prstGeom>
-          <a:noFill/>
-          <a:ln/>
-        </p:spPr>
-        <p:txBody>
-          <a:bodyPr wrap="square" lIns="0" tIns="0" rIns="0" bIns="0" rtlCol="0" anchor="ctr"/>
-          <a:lstStyle/>
-          <a:p>
-            <a:pPr algn="l" indent="0" marL="0">
-              <a:buNone/>
-            </a:pPr>
-            <a:r>
-              <a:rPr lang="en-US" sz="900" dirty="0">
-                <a:solidFill>
-                  <a:srgbClr val="5D5D72"/>
-                </a:solidFill>
-                <a:latin typeface="Calibri" pitchFamily="34" charset="0"/>
-                <a:ea typeface="Calibri" pitchFamily="34" charset="-122"/>
-                <a:cs typeface="Calibri" pitchFamily="34" charset="-120"/>
-              </a:rPr>
-              <a:t>Usman Akram  •  COMSATS University Islamabad</a:t>
-            </a:r>
-            <a:endParaRPr lang="en-US" sz="900" dirty="0"/>
-          </a:p>
-        </p:txBody>
-      </p:sp>
-      <p:sp>
-        <p:nvSpPr>
-          <p:cNvPr id="23" name="Text 21"/>
-          <p:cNvSpPr txBox="1"/>
-          <p:nvPr/>
-        </p:nvSpPr>
-        <p:spPr>
-          <a:xfrm>
-            <a:off x="11155680" y="6446520"/>
-            <a:ext cx="457200" cy="292608"/>
-          </a:xfrm>
-          <a:prstGeom prst="rect">
-            <a:avLst/>
-          </a:prstGeom>
-          <a:noFill/>
-          <a:ln/>
-        </p:spPr>
-        <p:txBody>
-          <a:bodyPr wrap="square" lIns="0" tIns="0" rIns="0" bIns="0" rtlCol="0" anchor="ctr"/>
-          <a:lstStyle/>
-          <a:p>
-            <a:pPr algn="r" indent="0" marL="0">
-              <a:buNone/>
-            </a:pPr>
-            <a:r>
-              <a:rPr lang="en-US" sz="900" dirty="0">
-                <a:solidFill>
-                  <a:srgbClr val="5D5D72"/>
-                </a:solidFill>
-                <a:latin typeface="Calibri" pitchFamily="34" charset="0"/>
-                <a:ea typeface="Calibri" pitchFamily="34" charset="-122"/>
-                <a:cs typeface="Calibri" pitchFamily="34" charset="-120"/>
-              </a:rPr>
-              <a:t>4</a:t>
-            </a:r>
-            <a:endParaRPr lang="en-US" sz="900" dirty="0"/>
+          <p:cNvPr id="24" name="cuinotes-footer-mark"/>
+          <p:cNvSpPr txBox="1"/>
+          <p:nvPr/>
+        </p:nvSpPr>
+        <p:spPr>
+          <a:xfrm>
+            <a:off x="9951720" y="6455664"/>
+            <a:ext cx="2011680" cy="292608"/>
+          </a:xfrm>
+          <a:prstGeom prst="rect">
+            <a:avLst/>
+          </a:prstGeom>
+          <a:noFill/>
+        </p:spPr>
+        <p:txBody>
+          <a:bodyPr wrap="none" lIns="0" rIns="0" tIns="0" bIns="0">
+            <a:spAutoFit/>
+          </a:bodyPr>
+          <a:lstStyle/>
+          <a:p>
+            <a:pPr algn="r"/>
+            <a:r>
+              <a:rPr sz="1000">
+                <a:solidFill>
+                  <a:srgbClr val="8A939B"/>
+                </a:solidFill>
+                <a:hlinkClick r:id="rId3"/>
+              </a:rPr>
+              <a:t>cuinotes.com</a:t>
+            </a:r>
+            <a:r>
+              <a:rPr sz="1000">
+                <a:solidFill>
+                  <a:srgbClr val="8A939B"/>
+                </a:solidFill>
+              </a:rPr>
+              <a:t>  ·  4</a:t>
+            </a:r>
           </a:p>
         </p:txBody>
       </p:sp>
@@ -11450,6 +11265,10 @@
           </a:solidFill>
           <a:ln/>
         </p:spPr>
+        <p:txBody>
+          <a:bodyPr/>
+          <a:p/>
+        </p:txBody>
       </p:sp>
       <p:sp>
         <p:nvSpPr>
@@ -11528,6 +11347,10 @@
           </a:solidFill>
           <a:ln/>
         </p:spPr>
+        <p:txBody>
+          <a:bodyPr/>
+          <a:p/>
+        </p:txBody>
       </p:sp>
       <p:sp>
         <p:nvSpPr>
@@ -11609,6 +11432,10 @@
             <a:tailEnd type="triangle"/>
           </a:ln>
         </p:spPr>
+        <p:txBody>
+          <a:bodyPr/>
+          <a:p/>
+        </p:txBody>
       </p:sp>
       <p:sp>
         <p:nvSpPr>
@@ -11673,6 +11500,10 @@
             <a:tailEnd type="none"/>
           </a:ln>
         </p:spPr>
+        <p:txBody>
+          <a:bodyPr/>
+          <a:p/>
+        </p:txBody>
       </p:sp>
       <p:sp>
         <p:nvSpPr>
@@ -11737,6 +11568,10 @@
             <a:tailEnd type="triangle"/>
           </a:ln>
         </p:spPr>
+        <p:txBody>
+          <a:bodyPr/>
+          <a:p/>
+        </p:txBody>
       </p:sp>
       <p:sp>
         <p:nvSpPr>
@@ -11801,6 +11636,10 @@
             <a:tailEnd type="none"/>
           </a:ln>
         </p:spPr>
+        <p:txBody>
+          <a:bodyPr/>
+          <a:p/>
+        </p:txBody>
       </p:sp>
       <p:sp>
         <p:nvSpPr>
@@ -11882,79 +11721,44 @@
       </p:sp>
       <p:sp>
         <p:nvSpPr>
-          <p:cNvPr id="18" name="Text 16"/>
-          <p:cNvSpPr txBox="1"/>
-          <p:nvPr/>
-        </p:nvSpPr>
-        <p:spPr>
-          <a:xfrm>
-            <a:off x="640080" y="6446520"/>
-            <a:ext cx="8686800" cy="292608"/>
-          </a:xfrm>
-          <a:prstGeom prst="rect">
-            <a:avLst/>
-          </a:prstGeom>
-          <a:noFill/>
-          <a:ln/>
-        </p:spPr>
-        <p:txBody>
-          <a:bodyPr wrap="square" lIns="0" tIns="0" rIns="0" bIns="0" rtlCol="0" anchor="ctr"/>
-          <a:lstStyle/>
-          <a:p>
-            <a:pPr algn="l" indent="0" marL="0">
-              <a:buNone/>
-            </a:pPr>
-            <a:r>
-              <a:rPr lang="en-US" sz="900" dirty="0">
-                <a:solidFill>
-                  <a:srgbClr val="5D5D72"/>
-                </a:solidFill>
-                <a:latin typeface="Calibri" pitchFamily="34" charset="0"/>
-                <a:ea typeface="Calibri" pitchFamily="34" charset="-122"/>
-                <a:cs typeface="Calibri" pitchFamily="34" charset="-120"/>
-              </a:rPr>
-              <a:t>Usman Akram  •  COMSATS University Islamabad</a:t>
-            </a:r>
-            <a:endParaRPr lang="en-US" sz="900" dirty="0"/>
-          </a:p>
-        </p:txBody>
-      </p:sp>
-      <p:sp>
-        <p:nvSpPr>
-          <p:cNvPr id="19" name="Text 17"/>
-          <p:cNvSpPr txBox="1"/>
-          <p:nvPr/>
-        </p:nvSpPr>
-        <p:spPr>
-          <a:xfrm>
-            <a:off x="11155680" y="6446520"/>
-            <a:ext cx="457200" cy="292608"/>
-          </a:xfrm>
-          <a:prstGeom prst="rect">
-            <a:avLst/>
-          </a:prstGeom>
-          <a:noFill/>
-          <a:ln/>
-        </p:spPr>
-        <p:txBody>
-          <a:bodyPr wrap="square" lIns="0" tIns="0" rIns="0" bIns="0" rtlCol="0" anchor="ctr"/>
-          <a:lstStyle/>
-          <a:p>
-            <a:pPr algn="r" indent="0" marL="0">
-              <a:buNone/>
-            </a:pPr>
-            <a:r>
-              <a:rPr lang="en-US" sz="900" dirty="0">
-                <a:solidFill>
-                  <a:srgbClr val="5D5D72"/>
-                </a:solidFill>
-                <a:latin typeface="Calibri" pitchFamily="34" charset="0"/>
-                <a:ea typeface="Calibri" pitchFamily="34" charset="-122"/>
-                <a:cs typeface="Calibri" pitchFamily="34" charset="-120"/>
-              </a:rPr>
-              <a:t>5</a:t>
-            </a:r>
-            <a:endParaRPr lang="en-US" sz="900" dirty="0"/>
+          <p:cNvPr id="20" name="cuinotes-footer-mark"/>
+          <p:cNvSpPr txBox="1"/>
+          <p:nvPr/>
+        </p:nvSpPr>
+        <p:spPr>
+          <a:xfrm>
+            <a:off x="9951720" y="6455664"/>
+            <a:ext cx="2011680" cy="292608"/>
+          </a:xfrm>
+          <a:prstGeom prst="rect">
+            <a:avLst/>
+          </a:prstGeom>
+          <a:noFill/>
+        </p:spPr>
+        <p:txBody>
+          <a:bodyPr wrap="none" lIns="0" rIns="0" tIns="0" bIns="0">
+            <a:spAutoFit/>
+          </a:bodyPr>
+          <a:lstStyle/>
+          <a:p>
+            <a:pPr algn="r"/>
+            <a:r>
+              <a:rPr sz="1000">
+                <a:solidFill>
+                  <a:srgbClr val="8A939B"/>
+                </a:solidFill>
+                <a:hlinkClick r:id="rId3"/>
+              </a:rPr>
+              <a:t>cuinotes.com</a:t>
+            </a:r>
+            <a:r>
+              <a:rPr sz="1000">
+                <a:solidFill>
+                  <a:srgbClr val="8A939B"/>
+                </a:solidFill>
+              </a:rPr>
+              <a:t>  ·  5</a:t>
+            </a:r>
           </a:p>
         </p:txBody>
       </p:sp>
@@ -12128,6 +11932,10 @@
           </a:solidFill>
           <a:ln/>
         </p:spPr>
+        <p:txBody>
+          <a:bodyPr/>
+          <a:p/>
+        </p:txBody>
       </p:sp>
       <p:sp>
         <p:nvSpPr>
@@ -12872,79 +12680,44 @@
       </p:sp>
       <p:sp>
         <p:nvSpPr>
-          <p:cNvPr id="25" name="Text 23"/>
-          <p:cNvSpPr txBox="1"/>
-          <p:nvPr/>
-        </p:nvSpPr>
-        <p:spPr>
-          <a:xfrm>
-            <a:off x="640080" y="6446520"/>
-            <a:ext cx="8686800" cy="292608"/>
-          </a:xfrm>
-          <a:prstGeom prst="rect">
-            <a:avLst/>
-          </a:prstGeom>
-          <a:noFill/>
-          <a:ln/>
-        </p:spPr>
-        <p:txBody>
-          <a:bodyPr wrap="square" lIns="0" tIns="0" rIns="0" bIns="0" rtlCol="0" anchor="ctr"/>
-          <a:lstStyle/>
-          <a:p>
-            <a:pPr algn="l" indent="0" marL="0">
-              <a:buNone/>
-            </a:pPr>
-            <a:r>
-              <a:rPr lang="en-US" sz="900" dirty="0">
-                <a:solidFill>
-                  <a:srgbClr val="5D5D72"/>
-                </a:solidFill>
-                <a:latin typeface="Calibri" pitchFamily="34" charset="0"/>
-                <a:ea typeface="Calibri" pitchFamily="34" charset="-122"/>
-                <a:cs typeface="Calibri" pitchFamily="34" charset="-120"/>
-              </a:rPr>
-              <a:t>Usman Akram  •  COMSATS University Islamabad</a:t>
-            </a:r>
-            <a:endParaRPr lang="en-US" sz="900" dirty="0"/>
-          </a:p>
-        </p:txBody>
-      </p:sp>
-      <p:sp>
-        <p:nvSpPr>
-          <p:cNvPr id="26" name="Text 24"/>
-          <p:cNvSpPr txBox="1"/>
-          <p:nvPr/>
-        </p:nvSpPr>
-        <p:spPr>
-          <a:xfrm>
-            <a:off x="11155680" y="6446520"/>
-            <a:ext cx="457200" cy="292608"/>
-          </a:xfrm>
-          <a:prstGeom prst="rect">
-            <a:avLst/>
-          </a:prstGeom>
-          <a:noFill/>
-          <a:ln/>
-        </p:spPr>
-        <p:txBody>
-          <a:bodyPr wrap="square" lIns="0" tIns="0" rIns="0" bIns="0" rtlCol="0" anchor="ctr"/>
-          <a:lstStyle/>
-          <a:p>
-            <a:pPr algn="r" indent="0" marL="0">
-              <a:buNone/>
-            </a:pPr>
-            <a:r>
-              <a:rPr lang="en-US" sz="900" dirty="0">
-                <a:solidFill>
-                  <a:srgbClr val="5D5D72"/>
-                </a:solidFill>
-                <a:latin typeface="Calibri" pitchFamily="34" charset="0"/>
-                <a:ea typeface="Calibri" pitchFamily="34" charset="-122"/>
-                <a:cs typeface="Calibri" pitchFamily="34" charset="-120"/>
-              </a:rPr>
-              <a:t>6</a:t>
-            </a:r>
-            <a:endParaRPr lang="en-US" sz="900" dirty="0"/>
+          <p:cNvPr id="27" name="cuinotes-footer-mark"/>
+          <p:cNvSpPr txBox="1"/>
+          <p:nvPr/>
+        </p:nvSpPr>
+        <p:spPr>
+          <a:xfrm>
+            <a:off x="9951720" y="6455664"/>
+            <a:ext cx="2011680" cy="292608"/>
+          </a:xfrm>
+          <a:prstGeom prst="rect">
+            <a:avLst/>
+          </a:prstGeom>
+          <a:noFill/>
+        </p:spPr>
+        <p:txBody>
+          <a:bodyPr wrap="none" lIns="0" rIns="0" tIns="0" bIns="0">
+            <a:spAutoFit/>
+          </a:bodyPr>
+          <a:lstStyle/>
+          <a:p>
+            <a:pPr algn="r"/>
+            <a:r>
+              <a:rPr sz="1000">
+                <a:solidFill>
+                  <a:srgbClr val="8A939B"/>
+                </a:solidFill>
+                <a:hlinkClick r:id="rId3"/>
+              </a:rPr>
+              <a:t>cuinotes.com</a:t>
+            </a:r>
+            <a:r>
+              <a:rPr sz="1000">
+                <a:solidFill>
+                  <a:srgbClr val="8A939B"/>
+                </a:solidFill>
+              </a:rPr>
+              <a:t>  ·  6</a:t>
+            </a:r>
           </a:p>
         </p:txBody>
       </p:sp>
@@ -13084,6 +12857,10 @@
             <a:prstDash val="solid"/>
           </a:ln>
         </p:spPr>
+        <p:txBody>
+          <a:bodyPr/>
+          <a:p/>
+        </p:txBody>
       </p:sp>
       <p:sp>
         <p:nvSpPr>
@@ -13235,6 +13012,10 @@
             <a:prstDash val="solid"/>
           </a:ln>
         </p:spPr>
+        <p:txBody>
+          <a:bodyPr/>
+          <a:p/>
+        </p:txBody>
       </p:sp>
       <p:sp>
         <p:nvSpPr>
@@ -13386,6 +13167,10 @@
             <a:prstDash val="solid"/>
           </a:ln>
         </p:spPr>
+        <p:txBody>
+          <a:bodyPr/>
+          <a:p/>
+        </p:txBody>
       </p:sp>
       <p:sp>
         <p:nvSpPr>
@@ -13428,79 +13213,44 @@
       </p:sp>
       <p:sp>
         <p:nvSpPr>
-          <p:cNvPr id="12" name="Text 10"/>
-          <p:cNvSpPr txBox="1"/>
-          <p:nvPr/>
-        </p:nvSpPr>
-        <p:spPr>
-          <a:xfrm>
-            <a:off x="640080" y="6446520"/>
-            <a:ext cx="8686800" cy="292608"/>
-          </a:xfrm>
-          <a:prstGeom prst="rect">
-            <a:avLst/>
-          </a:prstGeom>
-          <a:noFill/>
-          <a:ln/>
-        </p:spPr>
-        <p:txBody>
-          <a:bodyPr wrap="square" lIns="0" tIns="0" rIns="0" bIns="0" rtlCol="0" anchor="ctr"/>
-          <a:lstStyle/>
-          <a:p>
-            <a:pPr algn="l" indent="0" marL="0">
-              <a:buNone/>
-            </a:pPr>
-            <a:r>
-              <a:rPr lang="en-US" sz="900" dirty="0">
-                <a:solidFill>
-                  <a:srgbClr val="5D5D72"/>
-                </a:solidFill>
-                <a:latin typeface="Calibri" pitchFamily="34" charset="0"/>
-                <a:ea typeface="Calibri" pitchFamily="34" charset="-122"/>
-                <a:cs typeface="Calibri" pitchFamily="34" charset="-120"/>
-              </a:rPr>
-              <a:t>Usman Akram  •  COMSATS University Islamabad</a:t>
-            </a:r>
-            <a:endParaRPr lang="en-US" sz="900" dirty="0"/>
-          </a:p>
-        </p:txBody>
-      </p:sp>
-      <p:sp>
-        <p:nvSpPr>
-          <p:cNvPr id="13" name="Text 11"/>
-          <p:cNvSpPr txBox="1"/>
-          <p:nvPr/>
-        </p:nvSpPr>
-        <p:spPr>
-          <a:xfrm>
-            <a:off x="11155680" y="6446520"/>
-            <a:ext cx="457200" cy="292608"/>
-          </a:xfrm>
-          <a:prstGeom prst="rect">
-            <a:avLst/>
-          </a:prstGeom>
-          <a:noFill/>
-          <a:ln/>
-        </p:spPr>
-        <p:txBody>
-          <a:bodyPr wrap="square" lIns="0" tIns="0" rIns="0" bIns="0" rtlCol="0" anchor="ctr"/>
-          <a:lstStyle/>
-          <a:p>
-            <a:pPr algn="r" indent="0" marL="0">
-              <a:buNone/>
-            </a:pPr>
-            <a:r>
-              <a:rPr lang="en-US" sz="900" dirty="0">
-                <a:solidFill>
-                  <a:srgbClr val="5D5D72"/>
-                </a:solidFill>
-                <a:latin typeface="Calibri" pitchFamily="34" charset="0"/>
-                <a:ea typeface="Calibri" pitchFamily="34" charset="-122"/>
-                <a:cs typeface="Calibri" pitchFamily="34" charset="-120"/>
-              </a:rPr>
-              <a:t>7</a:t>
-            </a:r>
-            <a:endParaRPr lang="en-US" sz="900" dirty="0"/>
+          <p:cNvPr id="14" name="cuinotes-footer-mark"/>
+          <p:cNvSpPr txBox="1"/>
+          <p:nvPr/>
+        </p:nvSpPr>
+        <p:spPr>
+          <a:xfrm>
+            <a:off x="9951720" y="6455664"/>
+            <a:ext cx="2011680" cy="292608"/>
+          </a:xfrm>
+          <a:prstGeom prst="rect">
+            <a:avLst/>
+          </a:prstGeom>
+          <a:noFill/>
+        </p:spPr>
+        <p:txBody>
+          <a:bodyPr wrap="none" lIns="0" rIns="0" tIns="0" bIns="0">
+            <a:spAutoFit/>
+          </a:bodyPr>
+          <a:lstStyle/>
+          <a:p>
+            <a:pPr algn="r"/>
+            <a:r>
+              <a:rPr sz="1000">
+                <a:solidFill>
+                  <a:srgbClr val="8A939B"/>
+                </a:solidFill>
+                <a:hlinkClick r:id="rId3"/>
+              </a:rPr>
+              <a:t>cuinotes.com</a:t>
+            </a:r>
+            <a:r>
+              <a:rPr sz="1000">
+                <a:solidFill>
+                  <a:srgbClr val="8A939B"/>
+                </a:solidFill>
+              </a:rPr>
+              <a:t>  ·  7</a:t>
+            </a:r>
           </a:p>
         </p:txBody>
       </p:sp>
@@ -13672,6 +13422,10 @@
           </a:solidFill>
           <a:ln/>
         </p:spPr>
+        <p:txBody>
+          <a:bodyPr/>
+          <a:p/>
+        </p:txBody>
       </p:sp>
       <p:sp>
         <p:nvSpPr>
@@ -13801,6 +13555,10 @@
             <a:prstDash val="solid"/>
           </a:ln>
         </p:spPr>
+        <p:txBody>
+          <a:bodyPr/>
+          <a:p/>
+        </p:txBody>
       </p:sp>
       <p:sp>
         <p:nvSpPr>
@@ -13821,6 +13579,10 @@
           </a:solidFill>
           <a:ln/>
         </p:spPr>
+        <p:txBody>
+          <a:bodyPr/>
+          <a:p/>
+        </p:txBody>
       </p:sp>
       <p:sp>
         <p:nvSpPr>
@@ -13950,6 +13712,10 @@
             <a:prstDash val="solid"/>
           </a:ln>
         </p:spPr>
+        <p:txBody>
+          <a:bodyPr/>
+          <a:p/>
+        </p:txBody>
       </p:sp>
       <p:sp>
         <p:nvSpPr>
@@ -13970,6 +13736,10 @@
           </a:solidFill>
           <a:ln/>
         </p:spPr>
+        <p:txBody>
+          <a:bodyPr/>
+          <a:p/>
+        </p:txBody>
       </p:sp>
       <p:sp>
         <p:nvSpPr>
@@ -14099,6 +13869,10 @@
             <a:prstDash val="solid"/>
           </a:ln>
         </p:spPr>
+        <p:txBody>
+          <a:bodyPr/>
+          <a:p/>
+        </p:txBody>
       </p:sp>
       <p:sp>
         <p:nvSpPr>
@@ -14119,6 +13893,10 @@
           </a:solidFill>
           <a:ln/>
         </p:spPr>
+        <p:txBody>
+          <a:bodyPr/>
+          <a:p/>
+        </p:txBody>
       </p:sp>
       <p:sp>
         <p:nvSpPr>
@@ -14228,79 +14006,44 @@
       </p:sp>
       <p:sp>
         <p:nvSpPr>
-          <p:cNvPr id="20" name="Text 18"/>
-          <p:cNvSpPr txBox="1"/>
-          <p:nvPr/>
-        </p:nvSpPr>
-        <p:spPr>
-          <a:xfrm>
-            <a:off x="640080" y="6446520"/>
-            <a:ext cx="8686800" cy="292608"/>
-          </a:xfrm>
-          <a:prstGeom prst="rect">
-            <a:avLst/>
-          </a:prstGeom>
-          <a:noFill/>
-          <a:ln/>
-        </p:spPr>
-        <p:txBody>
-          <a:bodyPr wrap="square" lIns="0" tIns="0" rIns="0" bIns="0" rtlCol="0" anchor="ctr"/>
-          <a:lstStyle/>
-          <a:p>
-            <a:pPr algn="l" indent="0" marL="0">
-              <a:buNone/>
-            </a:pPr>
-            <a:r>
-              <a:rPr lang="en-US" sz="900" dirty="0">
-                <a:solidFill>
-                  <a:srgbClr val="5D5D72"/>
-                </a:solidFill>
-                <a:latin typeface="Calibri" pitchFamily="34" charset="0"/>
-                <a:ea typeface="Calibri" pitchFamily="34" charset="-122"/>
-                <a:cs typeface="Calibri" pitchFamily="34" charset="-120"/>
-              </a:rPr>
-              <a:t>Usman Akram  •  COMSATS University Islamabad</a:t>
-            </a:r>
-            <a:endParaRPr lang="en-US" sz="900" dirty="0"/>
-          </a:p>
-        </p:txBody>
-      </p:sp>
-      <p:sp>
-        <p:nvSpPr>
-          <p:cNvPr id="21" name="Text 19"/>
-          <p:cNvSpPr txBox="1"/>
-          <p:nvPr/>
-        </p:nvSpPr>
-        <p:spPr>
-          <a:xfrm>
-            <a:off x="11155680" y="6446520"/>
-            <a:ext cx="457200" cy="292608"/>
-          </a:xfrm>
-          <a:prstGeom prst="rect">
-            <a:avLst/>
-          </a:prstGeom>
-          <a:noFill/>
-          <a:ln/>
-        </p:spPr>
-        <p:txBody>
-          <a:bodyPr wrap="square" lIns="0" tIns="0" rIns="0" bIns="0" rtlCol="0" anchor="ctr"/>
-          <a:lstStyle/>
-          <a:p>
-            <a:pPr algn="r" indent="0" marL="0">
-              <a:buNone/>
-            </a:pPr>
-            <a:r>
-              <a:rPr lang="en-US" sz="900" dirty="0">
-                <a:solidFill>
-                  <a:srgbClr val="5D5D72"/>
-                </a:solidFill>
-                <a:latin typeface="Calibri" pitchFamily="34" charset="0"/>
-                <a:ea typeface="Calibri" pitchFamily="34" charset="-122"/>
-                <a:cs typeface="Calibri" pitchFamily="34" charset="-120"/>
-              </a:rPr>
-              <a:t>8</a:t>
-            </a:r>
-            <a:endParaRPr lang="en-US" sz="900" dirty="0"/>
+          <p:cNvPr id="22" name="cuinotes-footer-mark"/>
+          <p:cNvSpPr txBox="1"/>
+          <p:nvPr/>
+        </p:nvSpPr>
+        <p:spPr>
+          <a:xfrm>
+            <a:off x="9951720" y="6455664"/>
+            <a:ext cx="2011680" cy="292608"/>
+          </a:xfrm>
+          <a:prstGeom prst="rect">
+            <a:avLst/>
+          </a:prstGeom>
+          <a:noFill/>
+        </p:spPr>
+        <p:txBody>
+          <a:bodyPr wrap="none" lIns="0" rIns="0" tIns="0" bIns="0">
+            <a:spAutoFit/>
+          </a:bodyPr>
+          <a:lstStyle/>
+          <a:p>
+            <a:pPr algn="r"/>
+            <a:r>
+              <a:rPr sz="1000">
+                <a:solidFill>
+                  <a:srgbClr val="8A939B"/>
+                </a:solidFill>
+                <a:hlinkClick r:id="rId3"/>
+              </a:rPr>
+              <a:t>cuinotes.com</a:t>
+            </a:r>
+            <a:r>
+              <a:rPr sz="1000">
+                <a:solidFill>
+                  <a:srgbClr val="8A939B"/>
+                </a:solidFill>
+              </a:rPr>
+              <a:t>  ·  8</a:t>
+            </a:r>
           </a:p>
         </p:txBody>
       </p:sp>
@@ -14440,6 +14183,10 @@
             <a:prstDash val="solid"/>
           </a:ln>
         </p:spPr>
+        <p:txBody>
+          <a:bodyPr/>
+          <a:p/>
+        </p:txBody>
       </p:sp>
       <p:sp>
         <p:nvSpPr>
@@ -14584,6 +14331,10 @@
             <a:prstDash val="solid"/>
           </a:ln>
         </p:spPr>
+        <p:txBody>
+          <a:bodyPr/>
+          <a:p/>
+        </p:txBody>
       </p:sp>
       <p:sp>
         <p:nvSpPr>
@@ -14728,6 +14479,10 @@
             <a:prstDash val="solid"/>
           </a:ln>
         </p:spPr>
+        <p:txBody>
+          <a:bodyPr/>
+          <a:p/>
+        </p:txBody>
       </p:sp>
       <p:sp>
         <p:nvSpPr>
@@ -14848,79 +14603,44 @@
       </p:sp>
       <p:sp>
         <p:nvSpPr>
-          <p:cNvPr id="16" name="Text 14"/>
-          <p:cNvSpPr txBox="1"/>
-          <p:nvPr/>
-        </p:nvSpPr>
-        <p:spPr>
-          <a:xfrm>
-            <a:off x="640080" y="6446520"/>
-            <a:ext cx="8686800" cy="292608"/>
-          </a:xfrm>
-          <a:prstGeom prst="rect">
-            <a:avLst/>
-          </a:prstGeom>
-          <a:noFill/>
-          <a:ln/>
-        </p:spPr>
-        <p:txBody>
-          <a:bodyPr wrap="square" lIns="0" tIns="0" rIns="0" bIns="0" rtlCol="0" anchor="ctr"/>
-          <a:lstStyle/>
-          <a:p>
-            <a:pPr algn="l" indent="0" marL="0">
-              <a:buNone/>
-            </a:pPr>
-            <a:r>
-              <a:rPr lang="en-US" sz="900" dirty="0">
-                <a:solidFill>
-                  <a:srgbClr val="5D5D72"/>
-                </a:solidFill>
-                <a:latin typeface="Calibri" pitchFamily="34" charset="0"/>
-                <a:ea typeface="Calibri" pitchFamily="34" charset="-122"/>
-                <a:cs typeface="Calibri" pitchFamily="34" charset="-120"/>
-              </a:rPr>
-              <a:t>Usman Akram  •  COMSATS University Islamabad</a:t>
-            </a:r>
-            <a:endParaRPr lang="en-US" sz="900" dirty="0"/>
-          </a:p>
-        </p:txBody>
-      </p:sp>
-      <p:sp>
-        <p:nvSpPr>
-          <p:cNvPr id="17" name="Text 15"/>
-          <p:cNvSpPr txBox="1"/>
-          <p:nvPr/>
-        </p:nvSpPr>
-        <p:spPr>
-          <a:xfrm>
-            <a:off x="11155680" y="6446520"/>
-            <a:ext cx="457200" cy="292608"/>
-          </a:xfrm>
-          <a:prstGeom prst="rect">
-            <a:avLst/>
-          </a:prstGeom>
-          <a:noFill/>
-          <a:ln/>
-        </p:spPr>
-        <p:txBody>
-          <a:bodyPr wrap="square" lIns="0" tIns="0" rIns="0" bIns="0" rtlCol="0" anchor="ctr"/>
-          <a:lstStyle/>
-          <a:p>
-            <a:pPr algn="r" indent="0" marL="0">
-              <a:buNone/>
-            </a:pPr>
-            <a:r>
-              <a:rPr lang="en-US" sz="900" dirty="0">
-                <a:solidFill>
-                  <a:srgbClr val="5D5D72"/>
-                </a:solidFill>
-                <a:latin typeface="Calibri" pitchFamily="34" charset="0"/>
-                <a:ea typeface="Calibri" pitchFamily="34" charset="-122"/>
-                <a:cs typeface="Calibri" pitchFamily="34" charset="-120"/>
-              </a:rPr>
-              <a:t>9</a:t>
-            </a:r>
-            <a:endParaRPr lang="en-US" sz="900" dirty="0"/>
+          <p:cNvPr id="18" name="cuinotes-footer-mark"/>
+          <p:cNvSpPr txBox="1"/>
+          <p:nvPr/>
+        </p:nvSpPr>
+        <p:spPr>
+          <a:xfrm>
+            <a:off x="9951720" y="6455664"/>
+            <a:ext cx="2011680" cy="292608"/>
+          </a:xfrm>
+          <a:prstGeom prst="rect">
+            <a:avLst/>
+          </a:prstGeom>
+          <a:noFill/>
+        </p:spPr>
+        <p:txBody>
+          <a:bodyPr wrap="none" lIns="0" rIns="0" tIns="0" bIns="0">
+            <a:spAutoFit/>
+          </a:bodyPr>
+          <a:lstStyle/>
+          <a:p>
+            <a:pPr algn="r"/>
+            <a:r>
+              <a:rPr sz="1000">
+                <a:solidFill>
+                  <a:srgbClr val="8A939B"/>
+                </a:solidFill>
+                <a:hlinkClick r:id="rId3"/>
+              </a:rPr>
+              <a:t>cuinotes.com</a:t>
+            </a:r>
+            <a:r>
+              <a:rPr sz="1000">
+                <a:solidFill>
+                  <a:srgbClr val="8A939B"/>
+                </a:solidFill>
+              </a:rPr>
+              <a:t>  ·  9</a:t>
+            </a:r>
           </a:p>
         </p:txBody>
       </p:sp>
